--- a/GIT pagrindai.pptx
+++ b/GIT pagrindai.pptx
@@ -26899,6 +26899,10 @@
               <a:rPr lang="lt-LT" dirty="0" err="1"/>
               <a:t>extra</a:t>
             </a:r>
+            <a:r>
+              <a:rPr lang="en-US" dirty="0"/>
+              <a:t> (write in chat, we’ll try to find you a colleague)</a:t>
+            </a:r>
             <a:endParaRPr lang="lt-LT" dirty="0"/>
           </a:p>
         </p:txBody>
@@ -27161,13 +27165,13 @@
           <a:p>
             <a:r>
               <a:rPr lang="en-US" sz="3200" dirty="0"/>
-              <a:t>Clone your colleagues GitHub repo</a:t>
+              <a:t>Fork your colleagues GitHub repo</a:t>
             </a:r>
           </a:p>
           <a:p>
             <a:r>
               <a:rPr lang="en-US" sz="3200" dirty="0"/>
-              <a:t>Make your colleague a collaborator in your project</a:t>
+              <a:t>Clone</a:t>
             </a:r>
           </a:p>
           <a:p>
@@ -27197,7 +27201,7 @@
           <a:p>
             <a:r>
               <a:rPr lang="en-US" sz="3200" dirty="0"/>
-              <a:t>Review and merge the pull request in your GitHub project</a:t>
+              <a:t>Ask colleague to review and merge pull request</a:t>
             </a:r>
             <a:endParaRPr lang="lt-LT" sz="3200" dirty="0"/>
           </a:p>
@@ -30665,18 +30669,18 @@
 </file>
 
 <file path=customXml/item1.xml><?xml version="1.0" encoding="utf-8"?>
-<p:properties xmlns:p="http://schemas.microsoft.com/office/2006/metadata/properties" xmlns:xsi="http://www.w3.org/2001/XMLSchema-instance" xmlns:pc="http://schemas.microsoft.com/office/infopath/2007/PartnerControls">
-  <documentManagement/>
-</p:properties>
-</file>
-
-<file path=customXml/item2.xml><?xml version="1.0" encoding="utf-8"?>
 <?mso-contentType ?>
 <FormTemplates xmlns="http://schemas.microsoft.com/sharepoint/v3/contenttype/forms">
   <Display>DocumentLibraryForm</Display>
   <Edit>DocumentLibraryForm</Edit>
   <New>DocumentLibraryForm</New>
 </FormTemplates>
+</file>
+
+<file path=customXml/item2.xml><?xml version="1.0" encoding="utf-8"?>
+<p:properties xmlns:p="http://schemas.microsoft.com/office/2006/metadata/properties" xmlns:xsi="http://www.w3.org/2001/XMLSchema-instance" xmlns:pc="http://schemas.microsoft.com/office/infopath/2007/PartnerControls">
+  <documentManagement/>
+</p:properties>
 </file>
 
 <file path=customXml/item3.xml><?xml version="1.0" encoding="utf-8"?>
@@ -30828,18 +30832,18 @@
 </file>
 
 <file path=customXml/itemProps1.xml><?xml version="1.0" encoding="utf-8"?>
-<ds:datastoreItem xmlns:ds="http://schemas.openxmlformats.org/officeDocument/2006/customXml" ds:itemID="{1ED6C778-C4AA-4A66-B6B5-60690C5199CD}">
+<ds:datastoreItem xmlns:ds="http://schemas.openxmlformats.org/officeDocument/2006/customXml" ds:itemID="{C98144AE-B0E9-4A9D-8BA0-7C7CD27128C4}">
   <ds:schemaRefs>
-    <ds:schemaRef ds:uri="http://schemas.microsoft.com/office/2006/metadata/properties"/>
-    <ds:schemaRef ds:uri="http://schemas.microsoft.com/office/infopath/2007/PartnerControls"/>
+    <ds:schemaRef ds:uri="http://schemas.microsoft.com/sharepoint/v3/contenttype/forms"/>
   </ds:schemaRefs>
 </ds:datastoreItem>
 </file>
 
 <file path=customXml/itemProps2.xml><?xml version="1.0" encoding="utf-8"?>
-<ds:datastoreItem xmlns:ds="http://schemas.openxmlformats.org/officeDocument/2006/customXml" ds:itemID="{C98144AE-B0E9-4A9D-8BA0-7C7CD27128C4}">
+<ds:datastoreItem xmlns:ds="http://schemas.openxmlformats.org/officeDocument/2006/customXml" ds:itemID="{1ED6C778-C4AA-4A66-B6B5-60690C5199CD}">
   <ds:schemaRefs>
-    <ds:schemaRef ds:uri="http://schemas.microsoft.com/sharepoint/v3/contenttype/forms"/>
+    <ds:schemaRef ds:uri="http://schemas.microsoft.com/office/2006/metadata/properties"/>
+    <ds:schemaRef ds:uri="http://schemas.microsoft.com/office/infopath/2007/PartnerControls"/>
   </ds:schemaRefs>
 </ds:datastoreItem>
 </file>

--- a/GIT pagrindai.pptx
+++ b/GIT pagrindai.pptx
@@ -24249,8 +24249,11 @@
               <a:rPr lang="en-US" sz="3200" dirty="0">
                 <a:hlinkClick r:id="rId4"/>
               </a:rPr>
-              <a:t>https://stackoverflow.com/</a:t>
-            </a:r>
+              <a:t>https://www.google.com/</a:t>
+            </a:r>
+            <a:endParaRPr lang="en-US" sz="3200" dirty="0"/>
+          </a:p>
+          <a:p>
             <a:endParaRPr lang="en-US" sz="3200" dirty="0"/>
           </a:p>
           <a:p>
@@ -24258,7 +24261,7 @@
               <a:rPr lang="en-US" sz="3200" dirty="0">
                 <a:hlinkClick r:id="rId5"/>
               </a:rPr>
-              <a:t>https://www.google.com/</a:t>
+              <a:t>https://education.github.com/git-cheat-sheet-education.pdf</a:t>
             </a:r>
             <a:endParaRPr lang="en-US" sz="3200" dirty="0"/>
           </a:p>

--- a/GIT pagrindai.pptx
+++ b/GIT pagrindai.pptx
@@ -23881,15 +23881,15 @@
             </a:pPr>
             <a:r>
               <a:rPr lang="fr-FR" sz="2800" b="1" dirty="0"/>
-              <a:t>git config --</a:t>
-            </a:r>
-            <a:r>
-              <a:rPr lang="fr-FR" sz="2800" b="1" dirty="0" err="1"/>
-              <a:t>add</a:t>
+              <a:t>git </a:t>
+            </a:r>
+            <a:r>
+              <a:rPr lang="fr-FR" sz="2800" b="1"/>
+              <a:t>config --</a:t>
             </a:r>
             <a:r>
               <a:rPr lang="fr-FR" sz="2800" b="1" dirty="0"/>
-              <a:t> --system </a:t>
+              <a:t>system </a:t>
             </a:r>
             <a:r>
               <a:rPr lang="fr-FR" sz="2800" b="1" dirty="0" err="1"/>

--- a/GIT pagrindai.pptx
+++ b/GIT pagrindai.pptx
@@ -5,10 +5,10 @@
     <p:sldMasterId id="2147483648" r:id="rId4"/>
   </p:sldMasterIdLst>
   <p:notesMasterIdLst>
-    <p:notesMasterId r:id="rId57"/>
+    <p:notesMasterId r:id="rId56"/>
   </p:notesMasterIdLst>
   <p:handoutMasterIdLst>
-    <p:handoutMasterId r:id="rId58"/>
+    <p:handoutMasterId r:id="rId57"/>
   </p:handoutMasterIdLst>
   <p:sldIdLst>
     <p:sldId id="259" r:id="rId5"/>
@@ -44,25 +44,24 @@
     <p:sldId id="343" r:id="rId35"/>
     <p:sldId id="364" r:id="rId36"/>
     <p:sldId id="363" r:id="rId37"/>
-    <p:sldId id="345" r:id="rId38"/>
-    <p:sldId id="365" r:id="rId39"/>
-    <p:sldId id="346" r:id="rId40"/>
-    <p:sldId id="367" r:id="rId41"/>
-    <p:sldId id="310" r:id="rId42"/>
-    <p:sldId id="305" r:id="rId43"/>
-    <p:sldId id="306" r:id="rId44"/>
-    <p:sldId id="371" r:id="rId45"/>
-    <p:sldId id="354" r:id="rId46"/>
-    <p:sldId id="359" r:id="rId47"/>
-    <p:sldId id="307" r:id="rId48"/>
-    <p:sldId id="355" r:id="rId49"/>
-    <p:sldId id="348" r:id="rId50"/>
-    <p:sldId id="356" r:id="rId51"/>
-    <p:sldId id="362" r:id="rId52"/>
-    <p:sldId id="357" r:id="rId53"/>
-    <p:sldId id="358" r:id="rId54"/>
-    <p:sldId id="360" r:id="rId55"/>
-    <p:sldId id="361" r:id="rId56"/>
+    <p:sldId id="365" r:id="rId38"/>
+    <p:sldId id="346" r:id="rId39"/>
+    <p:sldId id="367" r:id="rId40"/>
+    <p:sldId id="310" r:id="rId41"/>
+    <p:sldId id="305" r:id="rId42"/>
+    <p:sldId id="306" r:id="rId43"/>
+    <p:sldId id="371" r:id="rId44"/>
+    <p:sldId id="354" r:id="rId45"/>
+    <p:sldId id="359" r:id="rId46"/>
+    <p:sldId id="307" r:id="rId47"/>
+    <p:sldId id="355" r:id="rId48"/>
+    <p:sldId id="348" r:id="rId49"/>
+    <p:sldId id="356" r:id="rId50"/>
+    <p:sldId id="362" r:id="rId51"/>
+    <p:sldId id="357" r:id="rId52"/>
+    <p:sldId id="358" r:id="rId53"/>
+    <p:sldId id="360" r:id="rId54"/>
+    <p:sldId id="361" r:id="rId55"/>
   </p:sldIdLst>
   <p:sldSz cx="12192000" cy="6858000"/>
   <p:notesSz cx="6858000" cy="9144000"/>
@@ -3185,7 +3184,7 @@
     </p:spTree>
     <p:extLst>
       <p:ext uri="{BB962C8B-B14F-4D97-AF65-F5344CB8AC3E}">
-        <p14:creationId xmlns:p14="http://schemas.microsoft.com/office/powerpoint/2010/main" val="2435909096"/>
+        <p14:creationId xmlns:p14="http://schemas.microsoft.com/office/powerpoint/2010/main" val="2315526341"/>
       </p:ext>
     </p:extLst>
   </p:cSld>
@@ -3270,7 +3269,7 @@
     </p:spTree>
     <p:extLst>
       <p:ext uri="{BB962C8B-B14F-4D97-AF65-F5344CB8AC3E}">
-        <p14:creationId xmlns:p14="http://schemas.microsoft.com/office/powerpoint/2010/main" val="2315526341"/>
+        <p14:creationId xmlns:p14="http://schemas.microsoft.com/office/powerpoint/2010/main" val="555430749"/>
       </p:ext>
     </p:extLst>
   </p:cSld>
@@ -3355,7 +3354,7 @@
     </p:spTree>
     <p:extLst>
       <p:ext uri="{BB962C8B-B14F-4D97-AF65-F5344CB8AC3E}">
-        <p14:creationId xmlns:p14="http://schemas.microsoft.com/office/powerpoint/2010/main" val="555430749"/>
+        <p14:creationId xmlns:p14="http://schemas.microsoft.com/office/powerpoint/2010/main" val="2855126952"/>
       </p:ext>
     </p:extLst>
   </p:cSld>
@@ -3409,7 +3408,7 @@
           <a:bodyPr/>
           <a:lstStyle/>
           <a:p>
-            <a:endParaRPr lang="lt-LT" dirty="0"/>
+            <a:endParaRPr lang="en-US"/>
           </a:p>
         </p:txBody>
       </p:sp>
@@ -3440,7 +3439,7 @@
     </p:spTree>
     <p:extLst>
       <p:ext uri="{BB962C8B-B14F-4D97-AF65-F5344CB8AC3E}">
-        <p14:creationId xmlns:p14="http://schemas.microsoft.com/office/powerpoint/2010/main" val="2855126952"/>
+        <p14:creationId xmlns:p14="http://schemas.microsoft.com/office/powerpoint/2010/main" val="4202623894"/>
       </p:ext>
     </p:extLst>
   </p:cSld>
@@ -3579,7 +3578,7 @@
           <a:bodyPr/>
           <a:lstStyle/>
           <a:p>
-            <a:endParaRPr lang="en-US"/>
+            <a:endParaRPr lang="lt-LT" dirty="0"/>
           </a:p>
         </p:txBody>
       </p:sp>
@@ -3610,7 +3609,7 @@
     </p:spTree>
     <p:extLst>
       <p:ext uri="{BB962C8B-B14F-4D97-AF65-F5344CB8AC3E}">
-        <p14:creationId xmlns:p14="http://schemas.microsoft.com/office/powerpoint/2010/main" val="4202623894"/>
+        <p14:creationId xmlns:p14="http://schemas.microsoft.com/office/powerpoint/2010/main" val="3188560776"/>
       </p:ext>
     </p:extLst>
   </p:cSld>
@@ -3780,7 +3779,7 @@
     </p:spTree>
     <p:extLst>
       <p:ext uri="{BB962C8B-B14F-4D97-AF65-F5344CB8AC3E}">
-        <p14:creationId xmlns:p14="http://schemas.microsoft.com/office/powerpoint/2010/main" val="3188560776"/>
+        <p14:creationId xmlns:p14="http://schemas.microsoft.com/office/powerpoint/2010/main" val="53422516"/>
       </p:ext>
     </p:extLst>
   </p:cSld>
@@ -3865,7 +3864,7 @@
     </p:spTree>
     <p:extLst>
       <p:ext uri="{BB962C8B-B14F-4D97-AF65-F5344CB8AC3E}">
-        <p14:creationId xmlns:p14="http://schemas.microsoft.com/office/powerpoint/2010/main" val="53422516"/>
+        <p14:creationId xmlns:p14="http://schemas.microsoft.com/office/powerpoint/2010/main" val="4141488813"/>
       </p:ext>
     </p:extLst>
   </p:cSld>
@@ -3950,7 +3949,7 @@
     </p:spTree>
     <p:extLst>
       <p:ext uri="{BB962C8B-B14F-4D97-AF65-F5344CB8AC3E}">
-        <p14:creationId xmlns:p14="http://schemas.microsoft.com/office/powerpoint/2010/main" val="4141488813"/>
+        <p14:creationId xmlns:p14="http://schemas.microsoft.com/office/powerpoint/2010/main" val="412630049"/>
       </p:ext>
     </p:extLst>
   </p:cSld>
@@ -4035,7 +4034,7 @@
     </p:spTree>
     <p:extLst>
       <p:ext uri="{BB962C8B-B14F-4D97-AF65-F5344CB8AC3E}">
-        <p14:creationId xmlns:p14="http://schemas.microsoft.com/office/powerpoint/2010/main" val="412630049"/>
+        <p14:creationId xmlns:p14="http://schemas.microsoft.com/office/powerpoint/2010/main" val="3188560776"/>
       </p:ext>
     </p:extLst>
   </p:cSld>
@@ -4120,7 +4119,7 @@
     </p:spTree>
     <p:extLst>
       <p:ext uri="{BB962C8B-B14F-4D97-AF65-F5344CB8AC3E}">
-        <p14:creationId xmlns:p14="http://schemas.microsoft.com/office/powerpoint/2010/main" val="3188560776"/>
+        <p14:creationId xmlns:p14="http://schemas.microsoft.com/office/powerpoint/2010/main" val="2075554035"/>
       </p:ext>
     </p:extLst>
   </p:cSld>
@@ -4205,7 +4204,7 @@
     </p:spTree>
     <p:extLst>
       <p:ext uri="{BB962C8B-B14F-4D97-AF65-F5344CB8AC3E}">
-        <p14:creationId xmlns:p14="http://schemas.microsoft.com/office/powerpoint/2010/main" val="2075554035"/>
+        <p14:creationId xmlns:p14="http://schemas.microsoft.com/office/powerpoint/2010/main" val="3439653993"/>
       </p:ext>
     </p:extLst>
   </p:cSld>
@@ -4290,7 +4289,7 @@
     </p:spTree>
     <p:extLst>
       <p:ext uri="{BB962C8B-B14F-4D97-AF65-F5344CB8AC3E}">
-        <p14:creationId xmlns:p14="http://schemas.microsoft.com/office/powerpoint/2010/main" val="3439653993"/>
+        <p14:creationId xmlns:p14="http://schemas.microsoft.com/office/powerpoint/2010/main" val="2183384820"/>
       </p:ext>
     </p:extLst>
   </p:cSld>
@@ -4344,7 +4343,7 @@
           <a:bodyPr/>
           <a:lstStyle/>
           <a:p>
-            <a:endParaRPr lang="lt-LT" dirty="0"/>
+            <a:endParaRPr lang="en-US"/>
           </a:p>
         </p:txBody>
       </p:sp>
@@ -4375,7 +4374,7 @@
     </p:spTree>
     <p:extLst>
       <p:ext uri="{BB962C8B-B14F-4D97-AF65-F5344CB8AC3E}">
-        <p14:creationId xmlns:p14="http://schemas.microsoft.com/office/powerpoint/2010/main" val="2183384820"/>
+        <p14:creationId xmlns:p14="http://schemas.microsoft.com/office/powerpoint/2010/main" val="392443468"/>
       </p:ext>
     </p:extLst>
   </p:cSld>
@@ -4429,7 +4428,7 @@
           <a:bodyPr/>
           <a:lstStyle/>
           <a:p>
-            <a:endParaRPr lang="en-US"/>
+            <a:endParaRPr lang="lt-LT" dirty="0"/>
           </a:p>
         </p:txBody>
       </p:sp>
@@ -4460,7 +4459,7 @@
     </p:spTree>
     <p:extLst>
       <p:ext uri="{BB962C8B-B14F-4D97-AF65-F5344CB8AC3E}">
-        <p14:creationId xmlns:p14="http://schemas.microsoft.com/office/powerpoint/2010/main" val="392443468"/>
+        <p14:creationId xmlns:p14="http://schemas.microsoft.com/office/powerpoint/2010/main" val="1775906756"/>
       </p:ext>
     </p:extLst>
   </p:cSld>
@@ -4545,7 +4544,7 @@
     </p:spTree>
     <p:extLst>
       <p:ext uri="{BB962C8B-B14F-4D97-AF65-F5344CB8AC3E}">
-        <p14:creationId xmlns:p14="http://schemas.microsoft.com/office/powerpoint/2010/main" val="1775906756"/>
+        <p14:creationId xmlns:p14="http://schemas.microsoft.com/office/powerpoint/2010/main" val="3535693947"/>
       </p:ext>
     </p:extLst>
   </p:cSld>
@@ -4715,7 +4714,7 @@
     </p:spTree>
     <p:extLst>
       <p:ext uri="{BB962C8B-B14F-4D97-AF65-F5344CB8AC3E}">
-        <p14:creationId xmlns:p14="http://schemas.microsoft.com/office/powerpoint/2010/main" val="3535693947"/>
+        <p14:creationId xmlns:p14="http://schemas.microsoft.com/office/powerpoint/2010/main" val="1990349743"/>
       </p:ext>
     </p:extLst>
   </p:cSld>
@@ -4792,91 +4791,6 @@
               <a:rPr lang="en-GB" smtClean="0"/>
               <a:pPr/>
               <a:t>51</a:t>
-            </a:fld>
-            <a:endParaRPr lang="en-GB"/>
-          </a:p>
-        </p:txBody>
-      </p:sp>
-    </p:spTree>
-    <p:extLst>
-      <p:ext uri="{BB962C8B-B14F-4D97-AF65-F5344CB8AC3E}">
-        <p14:creationId xmlns:p14="http://schemas.microsoft.com/office/powerpoint/2010/main" val="1990349743"/>
-      </p:ext>
-    </p:extLst>
-  </p:cSld>
-  <p:clrMapOvr>
-    <a:masterClrMapping/>
-  </p:clrMapOvr>
-</p:notes>
-</file>
-
-<file path=ppt/notesSlides/notesSlide52.xml><?xml version="1.0" encoding="utf-8"?>
-<p:notes xmlns:a="http://schemas.openxmlformats.org/drawingml/2006/main" xmlns:r="http://schemas.openxmlformats.org/officeDocument/2006/relationships" xmlns:p="http://schemas.openxmlformats.org/presentationml/2006/main">
-  <p:cSld>
-    <p:spTree>
-      <p:nvGrpSpPr>
-        <p:cNvPr id="1" name=""/>
-        <p:cNvGrpSpPr/>
-        <p:nvPr/>
-      </p:nvGrpSpPr>
-      <p:grpSpPr>
-        <a:xfrm>
-          <a:off x="0" y="0"/>
-          <a:ext cx="0" cy="0"/>
-          <a:chOff x="0" y="0"/>
-          <a:chExt cx="0" cy="0"/>
-        </a:xfrm>
-      </p:grpSpPr>
-      <p:sp>
-        <p:nvSpPr>
-          <p:cNvPr id="2" name="Slide Image Placeholder 1"/>
-          <p:cNvSpPr>
-            <a:spLocks noGrp="1" noRot="1" noChangeAspect="1"/>
-          </p:cNvSpPr>
-          <p:nvPr>
-            <p:ph type="sldImg"/>
-          </p:nvPr>
-        </p:nvSpPr>
-        <p:spPr/>
-      </p:sp>
-      <p:sp>
-        <p:nvSpPr>
-          <p:cNvPr id="3" name="Notes Placeholder 2"/>
-          <p:cNvSpPr>
-            <a:spLocks noGrp="1"/>
-          </p:cNvSpPr>
-          <p:nvPr>
-            <p:ph type="body" idx="1"/>
-          </p:nvPr>
-        </p:nvSpPr>
-        <p:spPr/>
-        <p:txBody>
-          <a:bodyPr/>
-          <a:lstStyle/>
-          <a:p>
-            <a:endParaRPr lang="lt-LT" dirty="0"/>
-          </a:p>
-        </p:txBody>
-      </p:sp>
-      <p:sp>
-        <p:nvSpPr>
-          <p:cNvPr id="4" name="Slide Number Placeholder 3"/>
-          <p:cNvSpPr>
-            <a:spLocks noGrp="1"/>
-          </p:cNvSpPr>
-          <p:nvPr>
-            <p:ph type="sldNum" sz="quarter" idx="10"/>
-          </p:nvPr>
-        </p:nvSpPr>
-        <p:spPr/>
-        <p:txBody>
-          <a:bodyPr/>
-          <a:lstStyle/>
-          <a:p>
-            <a:fld id="{A16CFAD1-D197-4A88-B173-A6412E995EE5}" type="slidenum">
-              <a:rPr lang="en-GB" smtClean="0"/>
-              <a:pPr/>
-              <a:t>52</a:t>
             </a:fld>
             <a:endParaRPr lang="en-GB"/>
           </a:p>
@@ -23678,7 +23592,7 @@
           <a:p>
             <a:r>
               <a:rPr lang="en-US" dirty="0"/>
-              <a:t>Redo commits</a:t>
+              <a:t>Useful stuff</a:t>
             </a:r>
           </a:p>
         </p:txBody>
@@ -23707,15 +23621,36 @@
               <a:buNone/>
             </a:pPr>
             <a:r>
-              <a:rPr lang="en-US" sz="2800" b="1" dirty="0"/>
-              <a:t>git reset [commit]</a:t>
-            </a:r>
+              <a:rPr lang="fr-FR" sz="2800" b="1" dirty="0"/>
+              <a:t>git </a:t>
+            </a:r>
+            <a:r>
+              <a:rPr lang="fr-FR" sz="2800" b="1"/>
+              <a:t>config --</a:t>
+            </a:r>
+            <a:r>
+              <a:rPr lang="fr-FR" sz="2800" b="1" dirty="0"/>
+              <a:t>system </a:t>
+            </a:r>
+            <a:r>
+              <a:rPr lang="fr-FR" sz="2800" b="1" dirty="0" err="1"/>
+              <a:t>core.editor</a:t>
+            </a:r>
+            <a:r>
+              <a:rPr lang="fr-FR" sz="2800" b="1" dirty="0"/>
+              <a:t> </a:t>
+            </a:r>
+            <a:r>
+              <a:rPr lang="fr-FR" sz="2800" b="1" dirty="0" err="1"/>
+              <a:t>notepad</a:t>
+            </a:r>
+            <a:endParaRPr lang="en-US" sz="2800" b="1" dirty="0"/>
           </a:p>
           <a:p>
             <a:pPr lvl="1"/>
             <a:r>
               <a:rPr lang="en-US" sz="2400" dirty="0"/>
-              <a:t> Undoes all commits after [commit], preserving changes locally</a:t>
+              <a:t> sets notepad as a default editor</a:t>
             </a:r>
           </a:p>
           <a:p>
@@ -23730,7 +23665,15 @@
             </a:pPr>
             <a:r>
               <a:rPr lang="fr-FR" sz="2800" b="1" dirty="0"/>
-              <a:t>git reset --hard [commit]</a:t>
+              <a:t>git config --global alias.[alias </a:t>
+            </a:r>
+            <a:r>
+              <a:rPr lang="fr-FR" sz="2800" b="1" dirty="0" err="1"/>
+              <a:t>name</a:t>
+            </a:r>
+            <a:r>
+              <a:rPr lang="fr-FR" sz="2800" b="1" dirty="0"/>
+              <a:t>] ‘[command]’</a:t>
             </a:r>
             <a:endParaRPr lang="en-US" sz="2800" b="1" dirty="0"/>
           </a:p>
@@ -23738,7 +23681,7 @@
             <a:pPr lvl="1"/>
             <a:r>
               <a:rPr lang="en-US" sz="2400" dirty="0"/>
-              <a:t> Clears staging area, rewrites working tree from specified [commit]</a:t>
+              <a:t> creates an alias for specified command</a:t>
             </a:r>
           </a:p>
         </p:txBody>
@@ -23807,7 +23750,7 @@
     </p:spTree>
     <p:extLst>
       <p:ext uri="{BB962C8B-B14F-4D97-AF65-F5344CB8AC3E}">
-        <p14:creationId xmlns:p14="http://schemas.microsoft.com/office/powerpoint/2010/main" val="1369041376"/>
+        <p14:creationId xmlns:p14="http://schemas.microsoft.com/office/powerpoint/2010/main" val="1508846262"/>
       </p:ext>
     </p:extLst>
   </p:cSld>
@@ -23851,8 +23794,13 @@
           <a:p>
             <a:r>
               <a:rPr lang="en-US" dirty="0"/>
-              <a:t>Useful stuff</a:t>
-            </a:r>
+              <a:t>.</a:t>
+            </a:r>
+            <a:r>
+              <a:rPr lang="en-US" dirty="0" err="1"/>
+              <a:t>gitignore</a:t>
+            </a:r>
+            <a:endParaRPr lang="en-US" dirty="0"/>
           </a:p>
         </p:txBody>
       </p:sp>
@@ -23876,71 +23824,17 @@
           <a:bodyPr/>
           <a:lstStyle/>
           <a:p>
-            <a:pPr marL="0" indent="0">
-              <a:buNone/>
-            </a:pPr>
-            <a:r>
-              <a:rPr lang="fr-FR" sz="2800" b="1" dirty="0"/>
-              <a:t>git </a:t>
-            </a:r>
-            <a:r>
-              <a:rPr lang="fr-FR" sz="2800" b="1"/>
-              <a:t>config --</a:t>
-            </a:r>
-            <a:r>
-              <a:rPr lang="fr-FR" sz="2800" b="1" dirty="0"/>
-              <a:t>system </a:t>
-            </a:r>
-            <a:r>
-              <a:rPr lang="fr-FR" sz="2800" b="1" dirty="0" err="1"/>
-              <a:t>core.editor</a:t>
-            </a:r>
-            <a:r>
-              <a:rPr lang="fr-FR" sz="2800" b="1" dirty="0"/>
-              <a:t> </a:t>
-            </a:r>
-            <a:r>
-              <a:rPr lang="fr-FR" sz="2800" b="1" dirty="0" err="1"/>
-              <a:t>notepad</a:t>
-            </a:r>
-            <a:endParaRPr lang="en-US" sz="2800" b="1" dirty="0"/>
-          </a:p>
-          <a:p>
-            <a:pPr lvl="1"/>
-            <a:r>
-              <a:rPr lang="en-US" sz="2400" dirty="0"/>
-              <a:t> sets notepad as a default editor</a:t>
-            </a:r>
-          </a:p>
-          <a:p>
-            <a:pPr marL="0" indent="0">
-              <a:buNone/>
-            </a:pPr>
-            <a:endParaRPr lang="en-US" sz="2400" dirty="0"/>
-          </a:p>
-          <a:p>
-            <a:pPr marL="0" indent="0">
-              <a:buNone/>
-            </a:pPr>
-            <a:r>
-              <a:rPr lang="fr-FR" sz="2800" b="1" dirty="0"/>
-              <a:t>git config --global alias.[alias </a:t>
-            </a:r>
-            <a:r>
-              <a:rPr lang="fr-FR" sz="2800" b="1" dirty="0" err="1"/>
-              <a:t>name</a:t>
-            </a:r>
-            <a:r>
-              <a:rPr lang="fr-FR" sz="2800" b="1" dirty="0"/>
-              <a:t>] ‘[command]’</a:t>
-            </a:r>
-            <a:endParaRPr lang="en-US" sz="2800" b="1" dirty="0"/>
-          </a:p>
-          <a:p>
-            <a:pPr lvl="1"/>
-            <a:r>
-              <a:rPr lang="en-US" sz="2400" dirty="0"/>
-              <a:t> creates an alias for specified command</a:t>
+            <a:r>
+              <a:rPr lang="en-US" sz="3200" dirty="0"/>
+              <a:t>.</a:t>
+            </a:r>
+            <a:r>
+              <a:rPr lang="en-US" sz="3200" dirty="0" err="1"/>
+              <a:t>gitignore</a:t>
+            </a:r>
+            <a:r>
+              <a:rPr lang="en-US" sz="3200" dirty="0"/>
+              <a:t> – file, that tells git which files (or patterns) it should ignore. It's usually used to avoid committing transient files from your working directory that aren't useful to other collaborators, such as compilation products, temporary files IDEs create, etc.</a:t>
             </a:r>
           </a:p>
         </p:txBody>
@@ -24009,7 +23903,7 @@
     </p:spTree>
     <p:extLst>
       <p:ext uri="{BB962C8B-B14F-4D97-AF65-F5344CB8AC3E}">
-        <p14:creationId xmlns:p14="http://schemas.microsoft.com/office/powerpoint/2010/main" val="1508846262"/>
+        <p14:creationId xmlns:p14="http://schemas.microsoft.com/office/powerpoint/2010/main" val="2138177104"/>
       </p:ext>
     </p:extLst>
   </p:cSld>
@@ -24053,11 +23947,11 @@
           <a:p>
             <a:r>
               <a:rPr lang="en-US" dirty="0"/>
-              <a:t>.</a:t>
-            </a:r>
-            <a:r>
-              <a:rPr lang="en-US" dirty="0" err="1"/>
-              <a:t>gitignore</a:t>
+              <a:t>Useful</a:t>
+            </a:r>
+            <a:r>
+              <a:rPr lang="lt-LT" dirty="0"/>
+              <a:t> links</a:t>
             </a:r>
             <a:endParaRPr lang="en-US" dirty="0"/>
           </a:p>
@@ -24084,17 +23978,36 @@
           <a:lstStyle/>
           <a:p>
             <a:r>
-              <a:rPr lang="en-US" sz="3200" dirty="0"/>
-              <a:t>.</a:t>
-            </a:r>
-            <a:r>
-              <a:rPr lang="en-US" sz="3200" dirty="0" err="1"/>
-              <a:t>gitignore</a:t>
-            </a:r>
-            <a:r>
-              <a:rPr lang="en-US" sz="3200" dirty="0"/>
-              <a:t> – file, that tells git which files (or patterns) it should ignore. It's usually used to avoid committing transient files from your working directory that aren't useful to other collaborators, such as compilation products, temporary files IDEs create, etc.</a:t>
-            </a:r>
+              <a:rPr lang="en-US" sz="3200" dirty="0">
+                <a:hlinkClick r:id="rId3"/>
+              </a:rPr>
+              <a:t>https://git-scm.com/book/en/v2</a:t>
+            </a:r>
+            <a:endParaRPr lang="en-US" sz="3200" dirty="0"/>
+          </a:p>
+          <a:p>
+            <a:r>
+              <a:rPr lang="en-US" sz="3200" dirty="0">
+                <a:hlinkClick r:id="rId4"/>
+              </a:rPr>
+              <a:t>https://www.google.com/</a:t>
+            </a:r>
+            <a:endParaRPr lang="en-US" sz="3200" dirty="0"/>
+          </a:p>
+          <a:p>
+            <a:endParaRPr lang="en-US" sz="3200" dirty="0"/>
+          </a:p>
+          <a:p>
+            <a:r>
+              <a:rPr lang="en-US" sz="3200" dirty="0">
+                <a:hlinkClick r:id="rId5"/>
+              </a:rPr>
+              <a:t>https://education.github.com/git-cheat-sheet-education.pdf</a:t>
+            </a:r>
+            <a:endParaRPr lang="en-US" sz="3200" dirty="0"/>
+          </a:p>
+          <a:p>
+            <a:endParaRPr lang="en-US" sz="3200" dirty="0"/>
           </a:p>
         </p:txBody>
       </p:sp>
@@ -24162,7 +24075,7 @@
     </p:spTree>
     <p:extLst>
       <p:ext uri="{BB962C8B-B14F-4D97-AF65-F5344CB8AC3E}">
-        <p14:creationId xmlns:p14="http://schemas.microsoft.com/office/powerpoint/2010/main" val="2138177104"/>
+        <p14:creationId xmlns:p14="http://schemas.microsoft.com/office/powerpoint/2010/main" val="843837089"/>
       </p:ext>
     </p:extLst>
   </p:cSld>
@@ -24189,14 +24102,39 @@
           <a:chExt cx="0" cy="0"/>
         </a:xfrm>
       </p:grpSpPr>
-      <p:sp>
-        <p:nvSpPr>
-          <p:cNvPr id="2" name="Title 1"/>
-          <p:cNvSpPr>
-            <a:spLocks noGrp="1"/>
-          </p:cNvSpPr>
-          <p:nvPr>
-            <p:ph type="title"/>
+      <p:pic>
+        <p:nvPicPr>
+          <p:cNvPr id="10" name="Picture Placeholder 9"/>
+          <p:cNvPicPr>
+            <a:picLocks noGrp="1" noChangeAspect="1"/>
+          </p:cNvPicPr>
+          <p:nvPr>
+            <p:ph type="pic" sz="quarter" idx="13"/>
+          </p:nvPr>
+        </p:nvPicPr>
+        <p:blipFill>
+          <a:blip r:embed="rId3">
+            <a:extLst>
+              <a:ext uri="{28A0092B-C50C-407E-A947-70E740481C1C}">
+                <a14:useLocalDpi xmlns:a14="http://schemas.microsoft.com/office/drawing/2010/main" val="0"/>
+              </a:ext>
+            </a:extLst>
+          </a:blip>
+          <a:srcRect l="4" r="4"/>
+          <a:stretch>
+            <a:fillRect/>
+          </a:stretch>
+        </p:blipFill>
+        <p:spPr/>
+      </p:pic>
+      <p:sp>
+        <p:nvSpPr>
+          <p:cNvPr id="7" name="Title 6"/>
+          <p:cNvSpPr>
+            <a:spLocks noGrp="1"/>
+          </p:cNvSpPr>
+          <p:nvPr>
+            <p:ph type="ctrTitle"/>
           </p:nvPr>
         </p:nvSpPr>
         <p:spPr/>
@@ -24206,67 +24144,38 @@
           <a:p>
             <a:r>
               <a:rPr lang="en-US" dirty="0"/>
-              <a:t>Useful</a:t>
-            </a:r>
-            <a:r>
-              <a:rPr lang="lt-LT" dirty="0"/>
-              <a:t> links</a:t>
-            </a:r>
-            <a:endParaRPr lang="en-US" dirty="0"/>
-          </a:p>
-        </p:txBody>
-      </p:sp>
-      <p:sp>
-        <p:nvSpPr>
-          <p:cNvPr id="3" name="Content Placeholder 2"/>
-          <p:cNvSpPr>
-            <a:spLocks noGrp="1"/>
-          </p:cNvSpPr>
-          <p:nvPr>
-            <p:ph idx="1"/>
-          </p:nvPr>
-        </p:nvSpPr>
-        <p:spPr>
-          <a:xfrm>
-            <a:off x="809624" y="1533905"/>
-            <a:ext cx="10621963" cy="4310303"/>
-          </a:xfrm>
-        </p:spPr>
-        <p:txBody>
-          <a:bodyPr/>
-          <a:lstStyle/>
-          <a:p>
-            <a:r>
-              <a:rPr lang="en-US" sz="3200" dirty="0">
-                <a:hlinkClick r:id="rId3"/>
-              </a:rPr>
-              <a:t>https://git-scm.com/book/en/v2</a:t>
-            </a:r>
-            <a:endParaRPr lang="en-US" sz="3200" dirty="0"/>
-          </a:p>
-          <a:p>
-            <a:r>
-              <a:rPr lang="en-US" sz="3200" dirty="0">
-                <a:hlinkClick r:id="rId4"/>
-              </a:rPr>
-              <a:t>https://www.google.com/</a:t>
-            </a:r>
-            <a:endParaRPr lang="en-US" sz="3200" dirty="0"/>
-          </a:p>
-          <a:p>
-            <a:endParaRPr lang="en-US" sz="3200" dirty="0"/>
-          </a:p>
-          <a:p>
-            <a:r>
-              <a:rPr lang="en-US" sz="3200" dirty="0">
-                <a:hlinkClick r:id="rId5"/>
-              </a:rPr>
-              <a:t>https://education.github.com/git-cheat-sheet-education.pdf</a:t>
-            </a:r>
-            <a:endParaRPr lang="en-US" sz="3200" dirty="0"/>
-          </a:p>
-          <a:p>
-            <a:endParaRPr lang="en-US" sz="3200" dirty="0"/>
+              <a:t>Thank you!</a:t>
+            </a:r>
+            <a:br>
+              <a:rPr lang="en-US" dirty="0"/>
+            </a:br>
+            <a:r>
+              <a:rPr lang="en-US" dirty="0"/>
+              <a:t>Questions?</a:t>
+            </a:r>
+            <a:endParaRPr lang="en-GB" dirty="0"/>
+          </a:p>
+        </p:txBody>
+      </p:sp>
+      <p:sp>
+        <p:nvSpPr>
+          <p:cNvPr id="8" name="Subtitle 7"/>
+          <p:cNvSpPr>
+            <a:spLocks noGrp="1"/>
+          </p:cNvSpPr>
+          <p:nvPr>
+            <p:ph type="subTitle" idx="1"/>
+          </p:nvPr>
+        </p:nvSpPr>
+        <p:spPr/>
+        <p:txBody>
+          <a:bodyPr/>
+          <a:lstStyle/>
+          <a:p>
+            <a:pPr>
+              <a:buNone/>
+            </a:pPr>
+            <a:endParaRPr lang="en-GB" dirty="0"/>
           </a:p>
         </p:txBody>
       </p:sp>
@@ -24285,7 +24194,7 @@
           <a:bodyPr/>
           <a:lstStyle/>
           <a:p>
-            <a:endParaRPr lang="en-GB" noProof="0" dirty="0"/>
+            <a:endParaRPr lang="en-GB" dirty="0"/>
           </a:p>
         </p:txBody>
       </p:sp>
@@ -24304,7 +24213,7 @@
           <a:bodyPr/>
           <a:lstStyle/>
           <a:p>
-            <a:endParaRPr lang="en-GB" noProof="0" dirty="0"/>
+            <a:endParaRPr lang="en-GB" dirty="0"/>
           </a:p>
         </p:txBody>
       </p:sp>
@@ -24323,18 +24232,19 @@
           <a:bodyPr/>
           <a:lstStyle/>
           <a:p>
-            <a:fld id="{859873C9-BF5D-4A9A-BB31-45BBB7BABAF7}" type="slidenum">
-              <a:rPr lang="en-GB" noProof="0" smtClean="0"/>
+            <a:fld id="{24C8C45C-947F-4981-8B3F-4F32E973C901}" type="slidenum">
+              <a:rPr lang="en-GB" smtClean="0"/>
+              <a:pPr/>
               <a:t>37</a:t>
             </a:fld>
-            <a:endParaRPr lang="en-GB" noProof="0" dirty="0"/>
+            <a:endParaRPr lang="en-GB" dirty="0"/>
           </a:p>
         </p:txBody>
       </p:sp>
     </p:spTree>
     <p:extLst>
       <p:ext uri="{BB962C8B-B14F-4D97-AF65-F5344CB8AC3E}">
-        <p14:creationId xmlns:p14="http://schemas.microsoft.com/office/powerpoint/2010/main" val="843837089"/>
+        <p14:creationId xmlns:p14="http://schemas.microsoft.com/office/powerpoint/2010/main" val="3713578127"/>
       </p:ext>
     </p:extLst>
   </p:cSld>
@@ -24403,14 +24313,14 @@
           <a:p>
             <a:r>
               <a:rPr lang="en-US" dirty="0"/>
-              <a:t>Thank you!</a:t>
+              <a:t>Practice</a:t>
             </a:r>
             <a:br>
               <a:rPr lang="en-US" dirty="0"/>
             </a:br>
             <a:r>
               <a:rPr lang="en-US" dirty="0"/>
-              <a:t>Questions?</a:t>
+              <a:t>(part 1)</a:t>
             </a:r>
             <a:endParaRPr lang="en-GB" dirty="0"/>
           </a:p>
@@ -24503,7 +24413,7 @@
     </p:spTree>
     <p:extLst>
       <p:ext uri="{BB962C8B-B14F-4D97-AF65-F5344CB8AC3E}">
-        <p14:creationId xmlns:p14="http://schemas.microsoft.com/office/powerpoint/2010/main" val="3713578127"/>
+        <p14:creationId xmlns:p14="http://schemas.microsoft.com/office/powerpoint/2010/main" val="4235957612"/>
       </p:ext>
     </p:extLst>
   </p:cSld>
@@ -24530,149 +24440,231 @@
           <a:chExt cx="0" cy="0"/>
         </a:xfrm>
       </p:grpSpPr>
-      <p:pic>
-        <p:nvPicPr>
-          <p:cNvPr id="10" name="Picture Placeholder 9"/>
-          <p:cNvPicPr>
-            <a:picLocks noGrp="1" noChangeAspect="1"/>
-          </p:cNvPicPr>
-          <p:nvPr>
-            <p:ph type="pic" sz="quarter" idx="13"/>
-          </p:nvPr>
-        </p:nvPicPr>
-        <p:blipFill>
-          <a:blip r:embed="rId3">
+      <p:sp>
+        <p:nvSpPr>
+          <p:cNvPr id="2" name="Title 1"/>
+          <p:cNvSpPr>
+            <a:spLocks noGrp="1"/>
+          </p:cNvSpPr>
+          <p:nvPr>
+            <p:ph type="title"/>
+          </p:nvPr>
+        </p:nvSpPr>
+        <p:spPr>
+          <a:xfrm>
+            <a:off x="784224" y="481665"/>
+            <a:ext cx="10671175" cy="1052240"/>
+          </a:xfrm>
+        </p:spPr>
+        <p:txBody>
+          <a:bodyPr/>
+          <a:lstStyle/>
+          <a:p>
+            <a:r>
+              <a:rPr lang="en-US" dirty="0"/>
+              <a:t>Task</a:t>
+            </a:r>
+            <a:r>
+              <a:rPr lang="lt-LT" dirty="0"/>
+              <a:t> </a:t>
+            </a:r>
+            <a:r>
+              <a:rPr lang="en-US" dirty="0"/>
+              <a:t>#</a:t>
+            </a:r>
+            <a:r>
+              <a:rPr lang="lt-LT" dirty="0"/>
+              <a:t>0</a:t>
+            </a:r>
+          </a:p>
+        </p:txBody>
+      </p:sp>
+      <p:sp>
+        <p:nvSpPr>
+          <p:cNvPr id="4" name="Date Placeholder 3"/>
+          <p:cNvSpPr>
+            <a:spLocks noGrp="1"/>
+          </p:cNvSpPr>
+          <p:nvPr>
+            <p:ph type="dt" sz="half" idx="10"/>
+          </p:nvPr>
+        </p:nvSpPr>
+        <p:spPr/>
+        <p:txBody>
+          <a:bodyPr/>
+          <a:lstStyle/>
+          <a:p>
+            <a:endParaRPr lang="en-GB" noProof="0" dirty="0"/>
+          </a:p>
+        </p:txBody>
+      </p:sp>
+      <p:sp>
+        <p:nvSpPr>
+          <p:cNvPr id="5" name="Footer Placeholder 4"/>
+          <p:cNvSpPr>
+            <a:spLocks noGrp="1"/>
+          </p:cNvSpPr>
+          <p:nvPr>
+            <p:ph type="ftr" sz="quarter" idx="11"/>
+          </p:nvPr>
+        </p:nvSpPr>
+        <p:spPr/>
+        <p:txBody>
+          <a:bodyPr/>
+          <a:lstStyle/>
+          <a:p>
+            <a:endParaRPr lang="en-GB" noProof="0" dirty="0"/>
+          </a:p>
+        </p:txBody>
+      </p:sp>
+      <p:sp>
+        <p:nvSpPr>
+          <p:cNvPr id="6" name="Slide Number Placeholder 5"/>
+          <p:cNvSpPr>
+            <a:spLocks noGrp="1"/>
+          </p:cNvSpPr>
+          <p:nvPr>
+            <p:ph type="sldNum" sz="quarter" idx="12"/>
+          </p:nvPr>
+        </p:nvSpPr>
+        <p:spPr/>
+        <p:txBody>
+          <a:bodyPr/>
+          <a:lstStyle/>
+          <a:p>
+            <a:fld id="{859873C9-BF5D-4A9A-BB31-45BBB7BABAF7}" type="slidenum">
+              <a:rPr lang="en-GB" noProof="0" smtClean="0"/>
+              <a:t>39</a:t>
+            </a:fld>
+            <a:endParaRPr lang="en-GB" noProof="0" dirty="0"/>
+          </a:p>
+        </p:txBody>
+      </p:sp>
+      <p:sp>
+        <p:nvSpPr>
+          <p:cNvPr id="9" name="Content Placeholder 2">
             <a:extLst>
-              <a:ext uri="{28A0092B-C50C-407E-A947-70E740481C1C}">
-                <a14:useLocalDpi xmlns:a14="http://schemas.microsoft.com/office/drawing/2010/main" val="0"/>
+              <a:ext uri="{FF2B5EF4-FFF2-40B4-BE49-F238E27FC236}">
+                <a16:creationId xmlns:a16="http://schemas.microsoft.com/office/drawing/2014/main" id="{6FBA3C69-E815-40A0-901C-A5E3695FC5A5}"/>
               </a:ext>
             </a:extLst>
-          </a:blip>
-          <a:srcRect l="4" r="4"/>
-          <a:stretch>
-            <a:fillRect/>
-          </a:stretch>
-        </p:blipFill>
-        <p:spPr/>
-      </p:pic>
-      <p:sp>
-        <p:nvSpPr>
-          <p:cNvPr id="7" name="Title 6"/>
-          <p:cNvSpPr>
-            <a:spLocks noGrp="1"/>
-          </p:cNvSpPr>
-          <p:nvPr>
-            <p:ph type="ctrTitle"/>
-          </p:nvPr>
-        </p:nvSpPr>
-        <p:spPr/>
-        <p:txBody>
-          <a:bodyPr/>
-          <a:lstStyle/>
-          <a:p>
-            <a:r>
-              <a:rPr lang="en-US" dirty="0"/>
-              <a:t>Practice</a:t>
-            </a:r>
-            <a:br>
-              <a:rPr lang="en-US" dirty="0"/>
-            </a:br>
-            <a:r>
-              <a:rPr lang="en-US" dirty="0"/>
-              <a:t>(part 1)</a:t>
-            </a:r>
-            <a:endParaRPr lang="en-GB" dirty="0"/>
-          </a:p>
-        </p:txBody>
-      </p:sp>
-      <p:sp>
-        <p:nvSpPr>
-          <p:cNvPr id="8" name="Subtitle 7"/>
-          <p:cNvSpPr>
-            <a:spLocks noGrp="1"/>
-          </p:cNvSpPr>
-          <p:nvPr>
-            <p:ph type="subTitle" idx="1"/>
-          </p:nvPr>
-        </p:nvSpPr>
-        <p:spPr/>
-        <p:txBody>
-          <a:bodyPr/>
-          <a:lstStyle/>
-          <a:p>
-            <a:pPr>
-              <a:buNone/>
-            </a:pPr>
-            <a:endParaRPr lang="en-GB" dirty="0"/>
-          </a:p>
-        </p:txBody>
-      </p:sp>
-      <p:sp>
-        <p:nvSpPr>
-          <p:cNvPr id="4" name="Date Placeholder 3"/>
-          <p:cNvSpPr>
-            <a:spLocks noGrp="1"/>
-          </p:cNvSpPr>
-          <p:nvPr>
-            <p:ph type="dt" sz="half" idx="10"/>
-          </p:nvPr>
-        </p:nvSpPr>
-        <p:spPr/>
-        <p:txBody>
-          <a:bodyPr/>
-          <a:lstStyle/>
-          <a:p>
-            <a:endParaRPr lang="en-GB" dirty="0"/>
-          </a:p>
-        </p:txBody>
-      </p:sp>
-      <p:sp>
-        <p:nvSpPr>
-          <p:cNvPr id="5" name="Footer Placeholder 4"/>
-          <p:cNvSpPr>
-            <a:spLocks noGrp="1"/>
-          </p:cNvSpPr>
-          <p:nvPr>
-            <p:ph type="ftr" sz="quarter" idx="11"/>
-          </p:nvPr>
-        </p:nvSpPr>
-        <p:spPr/>
-        <p:txBody>
-          <a:bodyPr/>
-          <a:lstStyle/>
-          <a:p>
-            <a:endParaRPr lang="en-GB" dirty="0"/>
-          </a:p>
-        </p:txBody>
-      </p:sp>
-      <p:sp>
-        <p:nvSpPr>
-          <p:cNvPr id="6" name="Slide Number Placeholder 5"/>
-          <p:cNvSpPr>
-            <a:spLocks noGrp="1"/>
-          </p:cNvSpPr>
-          <p:nvPr>
-            <p:ph type="sldNum" sz="quarter" idx="12"/>
-          </p:nvPr>
-        </p:nvSpPr>
-        <p:spPr/>
-        <p:txBody>
-          <a:bodyPr/>
-          <a:lstStyle/>
-          <a:p>
-            <a:fld id="{24C8C45C-947F-4981-8B3F-4F32E973C901}" type="slidenum">
-              <a:rPr lang="en-GB" smtClean="0"/>
-              <a:pPr/>
-              <a:t>39</a:t>
-            </a:fld>
-            <a:endParaRPr lang="en-GB" dirty="0"/>
+          </p:cNvPr>
+          <p:cNvSpPr>
+            <a:spLocks noGrp="1"/>
+          </p:cNvSpPr>
+          <p:nvPr>
+            <p:ph idx="1"/>
+          </p:nvPr>
+        </p:nvSpPr>
+        <p:spPr>
+          <a:xfrm>
+            <a:off x="809624" y="1533905"/>
+            <a:ext cx="10621963" cy="4310303"/>
+          </a:xfrm>
+        </p:spPr>
+        <p:txBody>
+          <a:bodyPr/>
+          <a:lstStyle/>
+          <a:p>
+            <a:r>
+              <a:rPr lang="lt-LT" sz="3200" dirty="0" err="1"/>
+              <a:t>Configure</a:t>
+            </a:r>
+            <a:r>
+              <a:rPr lang="lt-LT" sz="3200" dirty="0"/>
+              <a:t> </a:t>
+            </a:r>
+            <a:r>
+              <a:rPr lang="lt-LT" sz="3200" dirty="0" err="1"/>
+              <a:t>git</a:t>
+            </a:r>
+            <a:endParaRPr lang="lt-LT" sz="3200" dirty="0"/>
+          </a:p>
+          <a:p>
+            <a:pPr lvl="1"/>
+            <a:r>
+              <a:rPr lang="lt-LT" sz="2800" dirty="0"/>
+              <a:t> </a:t>
+            </a:r>
+            <a:r>
+              <a:rPr lang="lt-LT" sz="2800" dirty="0" err="1"/>
+              <a:t>set</a:t>
+            </a:r>
+            <a:r>
+              <a:rPr lang="lt-LT" sz="2800" dirty="0"/>
+              <a:t> </a:t>
+            </a:r>
+            <a:r>
+              <a:rPr lang="lt-LT" sz="2800" dirty="0" err="1"/>
+              <a:t>user</a:t>
+            </a:r>
+            <a:r>
+              <a:rPr lang="lt-LT" sz="2800" dirty="0"/>
+              <a:t> name</a:t>
+            </a:r>
+          </a:p>
+          <a:p>
+            <a:pPr lvl="1"/>
+            <a:r>
+              <a:rPr lang="lt-LT" sz="2800" dirty="0"/>
+              <a:t> </a:t>
+            </a:r>
+            <a:r>
+              <a:rPr lang="lt-LT" sz="2800" dirty="0" err="1"/>
+              <a:t>set</a:t>
+            </a:r>
+            <a:r>
+              <a:rPr lang="lt-LT" sz="2800" dirty="0"/>
+              <a:t> </a:t>
+            </a:r>
+            <a:r>
+              <a:rPr lang="lt-LT" sz="2800" dirty="0" err="1"/>
+              <a:t>email</a:t>
+            </a:r>
+            <a:endParaRPr lang="lt-LT" sz="2800" dirty="0"/>
+          </a:p>
+          <a:p>
+            <a:pPr lvl="1"/>
+            <a:r>
+              <a:rPr lang="lt-LT" sz="2800" dirty="0"/>
+              <a:t> </a:t>
+            </a:r>
+            <a:r>
+              <a:rPr lang="lt-LT" sz="2800" dirty="0" err="1"/>
+              <a:t>set</a:t>
+            </a:r>
+            <a:r>
+              <a:rPr lang="lt-LT" sz="2800" dirty="0"/>
+              <a:t> </a:t>
+            </a:r>
+            <a:r>
+              <a:rPr lang="lt-LT" sz="2800" dirty="0" err="1"/>
+              <a:t>default</a:t>
+            </a:r>
+            <a:r>
+              <a:rPr lang="lt-LT" sz="2800" dirty="0"/>
+              <a:t> </a:t>
+            </a:r>
+            <a:r>
+              <a:rPr lang="lt-LT" sz="2800" dirty="0" err="1"/>
+              <a:t>text</a:t>
+            </a:r>
+            <a:r>
+              <a:rPr lang="lt-LT" sz="2800" dirty="0"/>
+              <a:t> </a:t>
+            </a:r>
+            <a:r>
+              <a:rPr lang="lt-LT" sz="2800"/>
+              <a:t>editor</a:t>
+            </a:r>
+            <a:endParaRPr lang="lt-LT" sz="2800" dirty="0"/>
           </a:p>
         </p:txBody>
       </p:sp>
     </p:spTree>
     <p:extLst>
       <p:ext uri="{BB962C8B-B14F-4D97-AF65-F5344CB8AC3E}">
-        <p14:creationId xmlns:p14="http://schemas.microsoft.com/office/powerpoint/2010/main" val="4235957612"/>
+        <p14:creationId xmlns:p14="http://schemas.microsoft.com/office/powerpoint/2010/main" val="1977380185"/>
       </p:ext>
     </p:extLst>
   </p:cSld>
@@ -24920,12 +24912,9 @@
             </a:r>
             <a:r>
               <a:rPr lang="en-US" dirty="0"/>
-              <a:t>#</a:t>
-            </a:r>
-            <a:r>
-              <a:rPr lang="lt-LT" dirty="0"/>
-              <a:t>0</a:t>
-            </a:r>
+              <a:t>#1</a:t>
+            </a:r>
+            <a:endParaRPr lang="lt-LT" dirty="0"/>
           </a:p>
         </p:txBody>
       </p:sp>
@@ -25017,104 +25006,29 @@
           <a:lstStyle/>
           <a:p>
             <a:r>
-              <a:rPr lang="lt-LT" sz="3200" dirty="0" err="1"/>
-              <a:t>Configure</a:t>
-            </a:r>
-            <a:r>
-              <a:rPr lang="lt-LT" sz="3200" dirty="0"/>
-              <a:t> </a:t>
-            </a:r>
-            <a:r>
-              <a:rPr lang="lt-LT" sz="3200" dirty="0" err="1"/>
-              <a:t>git</a:t>
+              <a:rPr lang="en-US" sz="3200" dirty="0"/>
+              <a:t>Initialize a new git project</a:t>
+            </a:r>
+          </a:p>
+          <a:p>
+            <a:r>
+              <a:rPr lang="en-US" sz="3200" dirty="0"/>
+              <a:t>Create a new file “readme.txt”</a:t>
+            </a:r>
+          </a:p>
+          <a:p>
+            <a:r>
+              <a:rPr lang="en-US" sz="3200" dirty="0"/>
+              <a:t>Commit changes to local repo</a:t>
             </a:r>
             <a:endParaRPr lang="lt-LT" sz="3200" dirty="0"/>
-          </a:p>
-          <a:p>
-            <a:pPr lvl="1"/>
-            <a:r>
-              <a:rPr lang="lt-LT" sz="2800" dirty="0"/>
-              <a:t> </a:t>
-            </a:r>
-            <a:r>
-              <a:rPr lang="lt-LT" sz="2800" dirty="0" err="1"/>
-              <a:t>set</a:t>
-            </a:r>
-            <a:r>
-              <a:rPr lang="lt-LT" sz="2800" dirty="0"/>
-              <a:t> </a:t>
-            </a:r>
-            <a:r>
-              <a:rPr lang="lt-LT" sz="2800" dirty="0" err="1"/>
-              <a:t>user</a:t>
-            </a:r>
-            <a:r>
-              <a:rPr lang="lt-LT" sz="2800" dirty="0"/>
-              <a:t> name</a:t>
-            </a:r>
-          </a:p>
-          <a:p>
-            <a:pPr lvl="1"/>
-            <a:r>
-              <a:rPr lang="lt-LT" sz="2800" dirty="0"/>
-              <a:t> </a:t>
-            </a:r>
-            <a:r>
-              <a:rPr lang="lt-LT" sz="2800" dirty="0" err="1"/>
-              <a:t>set</a:t>
-            </a:r>
-            <a:r>
-              <a:rPr lang="lt-LT" sz="2800" dirty="0"/>
-              <a:t> </a:t>
-            </a:r>
-            <a:r>
-              <a:rPr lang="lt-LT" sz="2800" dirty="0" err="1"/>
-              <a:t>email</a:t>
-            </a:r>
-            <a:endParaRPr lang="lt-LT" sz="2800" dirty="0"/>
-          </a:p>
-          <a:p>
-            <a:pPr lvl="1"/>
-            <a:r>
-              <a:rPr lang="lt-LT" sz="2800" dirty="0"/>
-              <a:t> </a:t>
-            </a:r>
-            <a:r>
-              <a:rPr lang="lt-LT" sz="2800" dirty="0" err="1"/>
-              <a:t>set</a:t>
-            </a:r>
-            <a:r>
-              <a:rPr lang="lt-LT" sz="2800" dirty="0"/>
-              <a:t> </a:t>
-            </a:r>
-            <a:r>
-              <a:rPr lang="lt-LT" sz="2800" dirty="0" err="1"/>
-              <a:t>default</a:t>
-            </a:r>
-            <a:r>
-              <a:rPr lang="lt-LT" sz="2800" dirty="0"/>
-              <a:t> </a:t>
-            </a:r>
-            <a:r>
-              <a:rPr lang="lt-LT" sz="2800" dirty="0" err="1"/>
-              <a:t>text</a:t>
-            </a:r>
-            <a:r>
-              <a:rPr lang="lt-LT" sz="2800" dirty="0"/>
-              <a:t> </a:t>
-            </a:r>
-            <a:r>
-              <a:rPr lang="lt-LT" sz="2800"/>
-              <a:t>editor</a:t>
-            </a:r>
-            <a:endParaRPr lang="lt-LT" sz="2800" dirty="0"/>
           </a:p>
         </p:txBody>
       </p:sp>
     </p:spTree>
     <p:extLst>
       <p:ext uri="{BB962C8B-B14F-4D97-AF65-F5344CB8AC3E}">
-        <p14:creationId xmlns:p14="http://schemas.microsoft.com/office/powerpoint/2010/main" val="1977380185"/>
+        <p14:creationId xmlns:p14="http://schemas.microsoft.com/office/powerpoint/2010/main" val="1204573404"/>
       </p:ext>
     </p:extLst>
   </p:cSld>
@@ -25171,7 +25085,7 @@
             </a:r>
             <a:r>
               <a:rPr lang="en-US" dirty="0"/>
-              <a:t>#1</a:t>
+              <a:t>#2</a:t>
             </a:r>
             <a:endParaRPr lang="lt-LT" dirty="0"/>
           </a:p>
@@ -25266,28 +25180,44 @@
           <a:p>
             <a:r>
               <a:rPr lang="en-US" sz="3200" dirty="0"/>
-              <a:t>Initialize a new git project</a:t>
+              <a:t>Create a new directory “unwanted”</a:t>
             </a:r>
           </a:p>
           <a:p>
             <a:r>
               <a:rPr lang="en-US" sz="3200" dirty="0"/>
-              <a:t>Create a new file “readme.txt”</a:t>
-            </a:r>
+              <a:t>Create a new directory “important”</a:t>
+            </a:r>
+          </a:p>
+          <a:p>
+            <a:r>
+              <a:rPr lang="en-US" sz="3200" dirty="0"/>
+              <a:t>Create new files in each directories “file.txt”</a:t>
+            </a:r>
+          </a:p>
+          <a:p>
+            <a:r>
+              <a:rPr lang="en-US" sz="3200" dirty="0"/>
+              <a:t>Ignore “unwanted” </a:t>
+            </a:r>
+            <a:r>
+              <a:rPr lang="en-US" sz="3200" dirty="0" err="1"/>
+              <a:t>dir</a:t>
+            </a:r>
+            <a:endParaRPr lang="en-US" sz="3200" dirty="0"/>
           </a:p>
           <a:p>
             <a:r>
               <a:rPr lang="en-US" sz="3200" dirty="0"/>
               <a:t>Commit changes to local repo</a:t>
             </a:r>
-            <a:endParaRPr lang="lt-LT" sz="3200" dirty="0"/>
           </a:p>
         </p:txBody>
       </p:sp>
     </p:spTree>
     <p:extLst>
       <p:ext uri="{BB962C8B-B14F-4D97-AF65-F5344CB8AC3E}">
-        <p14:creationId xmlns:p14="http://schemas.microsoft.com/office/powerpoint/2010/main" val="1204573404"/>
+        <p14:creationId xmlns:p14="http://schemas.microsoft.com/office/powerpoint/2010/main" val="134737954"/>
       </p:ext>
     </p:extLst>
   </p:cSld>
@@ -25344,7 +25274,7 @@
             </a:r>
             <a:r>
               <a:rPr lang="en-US" dirty="0"/>
-              <a:t>#2</a:t>
+              <a:t>#3</a:t>
             </a:r>
             <a:endParaRPr lang="lt-LT" dirty="0"/>
           </a:p>
@@ -25413,62 +25343,214 @@
       </p:sp>
       <p:sp>
         <p:nvSpPr>
-          <p:cNvPr id="9" name="Content Placeholder 2">
+          <p:cNvPr id="7" name="Content Placeholder 2">
             <a:extLst>
               <a:ext uri="{FF2B5EF4-FFF2-40B4-BE49-F238E27FC236}">
-                <a16:creationId xmlns:a16="http://schemas.microsoft.com/office/drawing/2014/main" id="{6FBA3C69-E815-40A0-901C-A5E3695FC5A5}"/>
+                <a16:creationId xmlns:a16="http://schemas.microsoft.com/office/drawing/2014/main" id="{236D5AD3-798D-4235-9534-A03E209C626B}"/>
               </a:ext>
             </a:extLst>
           </p:cNvPr>
-          <p:cNvSpPr>
-            <a:spLocks noGrp="1"/>
-          </p:cNvSpPr>
-          <p:nvPr>
-            <p:ph idx="1"/>
-          </p:nvPr>
+          <p:cNvSpPr txBox="1">
+            <a:spLocks/>
+          </p:cNvSpPr>
+          <p:nvPr/>
         </p:nvSpPr>
         <p:spPr>
           <a:xfrm>
             <a:off x="809624" y="1533905"/>
             <a:ext cx="10621963" cy="4310303"/>
           </a:xfrm>
+          <a:prstGeom prst="rect">
+            <a:avLst/>
+          </a:prstGeom>
         </p:spPr>
         <p:txBody>
-          <a:bodyPr/>
-          <a:lstStyle/>
+          <a:bodyPr vert="horz" lIns="0" tIns="0" rIns="0" bIns="0" rtlCol="0">
+            <a:noAutofit/>
+          </a:bodyPr>
+          <a:lstStyle>
+            <a:lvl1pPr marL="216000" indent="-216000" algn="l" defTabSz="914400" rtl="0" eaLnBrk="1" latinLnBrk="0" hangingPunct="1">
+              <a:lnSpc>
+                <a:spcPct val="100000"/>
+              </a:lnSpc>
+              <a:spcBef>
+                <a:spcPts val="800"/>
+              </a:spcBef>
+              <a:buClr>
+                <a:schemeClr val="accent1"/>
+              </a:buClr>
+              <a:buFont typeface="Arial" panose="020B0604020202020204" pitchFamily="34" charset="0"/>
+              <a:buChar char="•"/>
+              <a:defRPr sz="2200" kern="1200">
+                <a:solidFill>
+                  <a:schemeClr val="tx1"/>
+                </a:solidFill>
+                <a:latin typeface="+mn-lt"/>
+                <a:ea typeface="+mn-ea"/>
+                <a:cs typeface="+mn-cs"/>
+              </a:defRPr>
+            </a:lvl1pPr>
+            <a:lvl2pPr marL="396000" indent="-180000" algn="l" defTabSz="914400" rtl="0" eaLnBrk="1" latinLnBrk="0" hangingPunct="1">
+              <a:lnSpc>
+                <a:spcPct val="100000"/>
+              </a:lnSpc>
+              <a:spcBef>
+                <a:spcPts val="800"/>
+              </a:spcBef>
+              <a:buFont typeface="Arial" panose="020B0604020202020204" pitchFamily="34" charset="0"/>
+              <a:buChar char="–"/>
+              <a:defRPr sz="1800" kern="1200">
+                <a:solidFill>
+                  <a:schemeClr val="tx1"/>
+                </a:solidFill>
+                <a:latin typeface="+mn-lt"/>
+                <a:ea typeface="+mn-ea"/>
+                <a:cs typeface="+mn-cs"/>
+              </a:defRPr>
+            </a:lvl2pPr>
+            <a:lvl3pPr marL="576000" indent="-180000" algn="l" defTabSz="914400" rtl="0" eaLnBrk="1" latinLnBrk="0" hangingPunct="1">
+              <a:lnSpc>
+                <a:spcPct val="100000"/>
+              </a:lnSpc>
+              <a:spcBef>
+                <a:spcPts val="800"/>
+              </a:spcBef>
+              <a:buFont typeface="Arial" panose="020B0604020202020204" pitchFamily="34" charset="0"/>
+              <a:buChar char="•"/>
+              <a:defRPr sz="1600" kern="1200">
+                <a:solidFill>
+                  <a:schemeClr val="tx1"/>
+                </a:solidFill>
+                <a:latin typeface="+mn-lt"/>
+                <a:ea typeface="+mn-ea"/>
+                <a:cs typeface="+mn-cs"/>
+              </a:defRPr>
+            </a:lvl3pPr>
+            <a:lvl4pPr marL="756000" indent="-180000" algn="l" defTabSz="914400" rtl="0" eaLnBrk="1" latinLnBrk="0" hangingPunct="1">
+              <a:lnSpc>
+                <a:spcPct val="100000"/>
+              </a:lnSpc>
+              <a:spcBef>
+                <a:spcPts val="800"/>
+              </a:spcBef>
+              <a:buFont typeface="Arial" panose="020B0604020202020204" pitchFamily="34" charset="0"/>
+              <a:buChar char="–"/>
+              <a:defRPr sz="1400" kern="1200">
+                <a:solidFill>
+                  <a:schemeClr val="tx1"/>
+                </a:solidFill>
+                <a:latin typeface="+mn-lt"/>
+                <a:ea typeface="+mn-ea"/>
+                <a:cs typeface="+mn-cs"/>
+              </a:defRPr>
+            </a:lvl4pPr>
+            <a:lvl5pPr marL="936000" indent="-180000" algn="l" defTabSz="914400" rtl="0" eaLnBrk="1" latinLnBrk="0" hangingPunct="1">
+              <a:lnSpc>
+                <a:spcPct val="100000"/>
+              </a:lnSpc>
+              <a:spcBef>
+                <a:spcPts val="800"/>
+              </a:spcBef>
+              <a:buFont typeface="Arial" panose="020B0604020202020204" pitchFamily="34" charset="0"/>
+              <a:buChar char="•"/>
+              <a:defRPr sz="1400" kern="1200">
+                <a:solidFill>
+                  <a:schemeClr val="tx1"/>
+                </a:solidFill>
+                <a:latin typeface="+mn-lt"/>
+                <a:ea typeface="+mn-ea"/>
+                <a:cs typeface="+mn-cs"/>
+              </a:defRPr>
+            </a:lvl5pPr>
+            <a:lvl6pPr marL="936000" indent="-180000" algn="l" defTabSz="914400" rtl="0" eaLnBrk="1" latinLnBrk="0" hangingPunct="1">
+              <a:lnSpc>
+                <a:spcPct val="100000"/>
+              </a:lnSpc>
+              <a:spcBef>
+                <a:spcPts val="800"/>
+              </a:spcBef>
+              <a:buFont typeface="Arial" panose="020B0604020202020204" pitchFamily="34" charset="0"/>
+              <a:buChar char="•"/>
+              <a:defRPr sz="1400" kern="1200">
+                <a:solidFill>
+                  <a:schemeClr val="tx1"/>
+                </a:solidFill>
+                <a:latin typeface="+mn-lt"/>
+                <a:ea typeface="+mn-ea"/>
+                <a:cs typeface="+mn-cs"/>
+              </a:defRPr>
+            </a:lvl6pPr>
+            <a:lvl7pPr marL="936000" indent="-180000" algn="l" defTabSz="914400" rtl="0" eaLnBrk="1" latinLnBrk="0" hangingPunct="1">
+              <a:lnSpc>
+                <a:spcPct val="100000"/>
+              </a:lnSpc>
+              <a:spcBef>
+                <a:spcPts val="800"/>
+              </a:spcBef>
+              <a:buFont typeface="Arial" panose="020B0604020202020204" pitchFamily="34" charset="0"/>
+              <a:buChar char="•"/>
+              <a:defRPr sz="1400" kern="1200" baseline="0">
+                <a:solidFill>
+                  <a:schemeClr val="tx1"/>
+                </a:solidFill>
+                <a:latin typeface="+mn-lt"/>
+                <a:ea typeface="+mn-ea"/>
+                <a:cs typeface="+mn-cs"/>
+              </a:defRPr>
+            </a:lvl7pPr>
+            <a:lvl8pPr marL="936000" indent="-180000" algn="l" defTabSz="914400" rtl="0" eaLnBrk="1" latinLnBrk="0" hangingPunct="1">
+              <a:lnSpc>
+                <a:spcPct val="100000"/>
+              </a:lnSpc>
+              <a:spcBef>
+                <a:spcPts val="800"/>
+              </a:spcBef>
+              <a:buFont typeface="Arial" panose="020B0604020202020204" pitchFamily="34" charset="0"/>
+              <a:buChar char="•"/>
+              <a:defRPr sz="1400" kern="1200">
+                <a:solidFill>
+                  <a:schemeClr val="tx1"/>
+                </a:solidFill>
+                <a:latin typeface="+mn-lt"/>
+                <a:ea typeface="+mn-ea"/>
+                <a:cs typeface="+mn-cs"/>
+              </a:defRPr>
+            </a:lvl8pPr>
+            <a:lvl9pPr marL="936000" indent="-180000" algn="l" defTabSz="914400" rtl="0" eaLnBrk="1" latinLnBrk="0" hangingPunct="1">
+              <a:lnSpc>
+                <a:spcPct val="100000"/>
+              </a:lnSpc>
+              <a:spcBef>
+                <a:spcPts val="800"/>
+              </a:spcBef>
+              <a:buFont typeface="Arial" panose="020B0604020202020204" pitchFamily="34" charset="0"/>
+              <a:buChar char="•"/>
+              <a:defRPr sz="1400" kern="1200" baseline="0">
+                <a:solidFill>
+                  <a:schemeClr val="tx1"/>
+                </a:solidFill>
+                <a:latin typeface="+mn-lt"/>
+                <a:ea typeface="+mn-ea"/>
+                <a:cs typeface="+mn-cs"/>
+              </a:defRPr>
+            </a:lvl9pPr>
+          </a:lstStyle>
           <a:p>
             <a:r>
               <a:rPr lang="en-US" sz="3200" dirty="0"/>
-              <a:t>Create a new directory “unwanted”</a:t>
+              <a:t>Create a new branch “feature”</a:t>
             </a:r>
           </a:p>
           <a:p>
             <a:r>
               <a:rPr lang="en-US" sz="3200" dirty="0"/>
-              <a:t>Create a new directory “important”</a:t>
+              <a:t>Make some changes in that branch</a:t>
             </a:r>
           </a:p>
           <a:p>
             <a:r>
               <a:rPr lang="en-US" sz="3200" dirty="0"/>
-              <a:t>Create new files in each directories “file.txt”</a:t>
-            </a:r>
-          </a:p>
-          <a:p>
-            <a:r>
-              <a:rPr lang="en-US" sz="3200" dirty="0"/>
-              <a:t>Ignore “unwanted” </a:t>
-            </a:r>
-            <a:r>
-              <a:rPr lang="en-US" sz="3200" dirty="0" err="1"/>
-              <a:t>dir</a:t>
-            </a:r>
-            <a:endParaRPr lang="en-US" sz="3200" dirty="0"/>
-          </a:p>
-          <a:p>
-            <a:r>
-              <a:rPr lang="en-US" sz="3200" dirty="0"/>
-              <a:t>Commit changes to local repo</a:t>
+              <a:t>Merge master with branch</a:t>
             </a:r>
           </a:p>
         </p:txBody>
@@ -25476,7 +25558,7 @@
     </p:spTree>
     <p:extLst>
       <p:ext uri="{BB962C8B-B14F-4D97-AF65-F5344CB8AC3E}">
-        <p14:creationId xmlns:p14="http://schemas.microsoft.com/office/powerpoint/2010/main" val="134737954"/>
+        <p14:creationId xmlns:p14="http://schemas.microsoft.com/office/powerpoint/2010/main" val="1879522515"/>
       </p:ext>
     </p:extLst>
   </p:cSld>
@@ -25533,7 +25615,7 @@
             </a:r>
             <a:r>
               <a:rPr lang="en-US" dirty="0"/>
-              <a:t>#3</a:t>
+              <a:t>#4</a:t>
             </a:r>
             <a:endParaRPr lang="lt-LT" dirty="0"/>
           </a:p>
@@ -25797,19 +25879,19 @@
           <a:p>
             <a:r>
               <a:rPr lang="en-US" sz="3200" dirty="0"/>
-              <a:t>Create a new branch “feature”</a:t>
+              <a:t>Create a new branch “conflicts” from master</a:t>
             </a:r>
           </a:p>
           <a:p>
             <a:r>
               <a:rPr lang="en-US" sz="3200" dirty="0"/>
-              <a:t>Make some changes in that branch</a:t>
+              <a:t>Create conflicting commits in master and new branch</a:t>
             </a:r>
           </a:p>
           <a:p>
             <a:r>
               <a:rPr lang="en-US" sz="3200" dirty="0"/>
-              <a:t>Merge master with branch</a:t>
+              <a:t>Merge master with branch (resolve conflict)</a:t>
             </a:r>
           </a:p>
         </p:txBody>
@@ -25817,7 +25899,7 @@
     </p:spTree>
     <p:extLst>
       <p:ext uri="{BB962C8B-B14F-4D97-AF65-F5344CB8AC3E}">
-        <p14:creationId xmlns:p14="http://schemas.microsoft.com/office/powerpoint/2010/main" val="1879522515"/>
+        <p14:creationId xmlns:p14="http://schemas.microsoft.com/office/powerpoint/2010/main" val="2318876804"/>
       </p:ext>
     </p:extLst>
   </p:cSld>
@@ -25874,7 +25956,7 @@
             </a:r>
             <a:r>
               <a:rPr lang="en-US" dirty="0"/>
-              <a:t>#4</a:t>
+              <a:t>#4 extra</a:t>
             </a:r>
             <a:endParaRPr lang="lt-LT" dirty="0"/>
           </a:p>
@@ -26138,19 +26220,13 @@
           <a:p>
             <a:r>
               <a:rPr lang="en-US" sz="3200" dirty="0"/>
-              <a:t>Create a new branch “conflicts” from master</a:t>
+              <a:t>Create another conflicting commit in master and “conflicts” branch</a:t>
             </a:r>
           </a:p>
           <a:p>
             <a:r>
               <a:rPr lang="en-US" sz="3200" dirty="0"/>
-              <a:t>Create conflicting commits in master and new branch</a:t>
-            </a:r>
-          </a:p>
-          <a:p>
-            <a:r>
-              <a:rPr lang="en-US" sz="3200" dirty="0"/>
-              <a:t>Merge master with branch (resolve conflict)</a:t>
+              <a:t>Rebase master with branch</a:t>
             </a:r>
           </a:p>
         </p:txBody>
@@ -26158,7 +26234,7 @@
     </p:spTree>
     <p:extLst>
       <p:ext uri="{BB962C8B-B14F-4D97-AF65-F5344CB8AC3E}">
-        <p14:creationId xmlns:p14="http://schemas.microsoft.com/office/powerpoint/2010/main" val="2318876804"/>
+        <p14:creationId xmlns:p14="http://schemas.microsoft.com/office/powerpoint/2010/main" val="3597253134"/>
       </p:ext>
     </p:extLst>
   </p:cSld>
@@ -26215,7 +26291,7 @@
             </a:r>
             <a:r>
               <a:rPr lang="en-US" dirty="0"/>
-              <a:t>#4 extra</a:t>
+              <a:t>#5</a:t>
             </a:r>
             <a:endParaRPr lang="lt-LT" dirty="0"/>
           </a:p>
@@ -26479,21 +26555,28 @@
           <a:p>
             <a:r>
               <a:rPr lang="en-US" sz="3200" dirty="0"/>
-              <a:t>Create another conflicting commit in master and “conflicts” branch</a:t>
+              <a:t>Create a new repository in GitHub</a:t>
             </a:r>
           </a:p>
           <a:p>
             <a:r>
               <a:rPr lang="en-US" sz="3200" dirty="0"/>
-              <a:t>Rebase master with branch</a:t>
-            </a:r>
+              <a:t>Setup remote in your local git project</a:t>
+            </a:r>
+          </a:p>
+          <a:p>
+            <a:r>
+              <a:rPr lang="en-US" sz="3200" dirty="0"/>
+              <a:t>Push changes to GitHub</a:t>
+            </a:r>
+            <a:endParaRPr lang="lt-LT" sz="3200" dirty="0"/>
           </a:p>
         </p:txBody>
       </p:sp>
     </p:spTree>
     <p:extLst>
       <p:ext uri="{BB962C8B-B14F-4D97-AF65-F5344CB8AC3E}">
-        <p14:creationId xmlns:p14="http://schemas.microsoft.com/office/powerpoint/2010/main" val="3597253134"/>
+        <p14:creationId xmlns:p14="http://schemas.microsoft.com/office/powerpoint/2010/main" val="289100511"/>
       </p:ext>
     </p:extLst>
   </p:cSld>
@@ -26550,7 +26633,19 @@
             </a:r>
             <a:r>
               <a:rPr lang="en-US" dirty="0"/>
-              <a:t>#5</a:t>
+              <a:t>#</a:t>
+            </a:r>
+            <a:r>
+              <a:rPr lang="lt-LT" dirty="0"/>
+              <a:t>5 </a:t>
+            </a:r>
+            <a:r>
+              <a:rPr lang="lt-LT" dirty="0" err="1"/>
+              <a:t>extra</a:t>
+            </a:r>
+            <a:r>
+              <a:rPr lang="en-US" dirty="0"/>
+              <a:t> (write in chat, we’ll try to find you a colleague)</a:t>
             </a:r>
             <a:endParaRPr lang="lt-LT" dirty="0"/>
           </a:p>
@@ -26814,19 +26909,43 @@
           <a:p>
             <a:r>
               <a:rPr lang="en-US" sz="3200" dirty="0"/>
-              <a:t>Create a new repository in GitHub</a:t>
+              <a:t>Fork your colleagues GitHub repo</a:t>
             </a:r>
           </a:p>
           <a:p>
             <a:r>
               <a:rPr lang="en-US" sz="3200" dirty="0"/>
-              <a:t>Setup remote in your local git project</a:t>
+              <a:t>Clone</a:t>
             </a:r>
           </a:p>
           <a:p>
             <a:r>
               <a:rPr lang="en-US" sz="3200" dirty="0"/>
-              <a:t>Push changes to GitHub</a:t>
+              <a:t>Create a new branch from “master” in git bash –  “collaborate”</a:t>
+            </a:r>
+          </a:p>
+          <a:p>
+            <a:r>
+              <a:rPr lang="en-US" sz="3200" dirty="0"/>
+              <a:t>Change something</a:t>
+            </a:r>
+          </a:p>
+          <a:p>
+            <a:r>
+              <a:rPr lang="en-US" sz="3200" dirty="0"/>
+              <a:t>Push it to remote “collaborate” branch</a:t>
+            </a:r>
+          </a:p>
+          <a:p>
+            <a:r>
+              <a:rPr lang="en-US" sz="3200" dirty="0"/>
+              <a:t>Create a pull request</a:t>
+            </a:r>
+          </a:p>
+          <a:p>
+            <a:r>
+              <a:rPr lang="en-US" sz="3200" dirty="0"/>
+              <a:t>Ask colleague to review and merge pull request</a:t>
             </a:r>
             <a:endParaRPr lang="lt-LT" sz="3200" dirty="0"/>
           </a:p>
@@ -26835,7 +26954,7 @@
     </p:spTree>
     <p:extLst>
       <p:ext uri="{BB962C8B-B14F-4D97-AF65-F5344CB8AC3E}">
-        <p14:creationId xmlns:p14="http://schemas.microsoft.com/office/powerpoint/2010/main" val="289100511"/>
+        <p14:creationId xmlns:p14="http://schemas.microsoft.com/office/powerpoint/2010/main" val="1156307921"/>
       </p:ext>
     </p:extLst>
   </p:cSld>
@@ -26862,51 +26981,80 @@
           <a:chExt cx="0" cy="0"/>
         </a:xfrm>
       </p:grpSpPr>
-      <p:sp>
-        <p:nvSpPr>
-          <p:cNvPr id="2" name="Title 1"/>
-          <p:cNvSpPr>
-            <a:spLocks noGrp="1"/>
-          </p:cNvSpPr>
-          <p:nvPr>
-            <p:ph type="title"/>
-          </p:nvPr>
-        </p:nvSpPr>
-        <p:spPr>
-          <a:xfrm>
-            <a:off x="784224" y="481665"/>
-            <a:ext cx="10671175" cy="1052240"/>
-          </a:xfrm>
-        </p:spPr>
+      <p:pic>
+        <p:nvPicPr>
+          <p:cNvPr id="10" name="Picture Placeholder 9"/>
+          <p:cNvPicPr>
+            <a:picLocks noGrp="1" noChangeAspect="1"/>
+          </p:cNvPicPr>
+          <p:nvPr>
+            <p:ph type="pic" sz="quarter" idx="13"/>
+          </p:nvPr>
+        </p:nvPicPr>
+        <p:blipFill>
+          <a:blip r:embed="rId3">
+            <a:extLst>
+              <a:ext uri="{28A0092B-C50C-407E-A947-70E740481C1C}">
+                <a14:useLocalDpi xmlns:a14="http://schemas.microsoft.com/office/drawing/2010/main" val="0"/>
+              </a:ext>
+            </a:extLst>
+          </a:blip>
+          <a:srcRect l="4" r="4"/>
+          <a:stretch>
+            <a:fillRect/>
+          </a:stretch>
+        </p:blipFill>
+        <p:spPr/>
+      </p:pic>
+      <p:sp>
+        <p:nvSpPr>
+          <p:cNvPr id="7" name="Title 6"/>
+          <p:cNvSpPr>
+            <a:spLocks noGrp="1"/>
+          </p:cNvSpPr>
+          <p:nvPr>
+            <p:ph type="ctrTitle"/>
+          </p:nvPr>
+        </p:nvSpPr>
+        <p:spPr/>
         <p:txBody>
           <a:bodyPr/>
           <a:lstStyle/>
           <a:p>
             <a:r>
               <a:rPr lang="en-US" dirty="0"/>
-              <a:t>Task</a:t>
-            </a:r>
-            <a:r>
-              <a:rPr lang="lt-LT" dirty="0"/>
-              <a:t> </a:t>
-            </a:r>
-            <a:r>
+              <a:t>Practice</a:t>
+            </a:r>
+            <a:br>
               <a:rPr lang="en-US" dirty="0"/>
-              <a:t>#</a:t>
-            </a:r>
-            <a:r>
-              <a:rPr lang="lt-LT" dirty="0"/>
-              <a:t>5 </a:t>
-            </a:r>
-            <a:r>
-              <a:rPr lang="lt-LT" dirty="0" err="1"/>
-              <a:t>extra</a:t>
-            </a:r>
+            </a:br>
             <a:r>
               <a:rPr lang="en-US" dirty="0"/>
-              <a:t> (write in chat, we’ll try to find you a colleague)</a:t>
-            </a:r>
-            <a:endParaRPr lang="lt-LT" dirty="0"/>
+              <a:t>(part 2)</a:t>
+            </a:r>
+            <a:endParaRPr lang="en-GB" dirty="0"/>
+          </a:p>
+        </p:txBody>
+      </p:sp>
+      <p:sp>
+        <p:nvSpPr>
+          <p:cNvPr id="8" name="Subtitle 7"/>
+          <p:cNvSpPr>
+            <a:spLocks noGrp="1"/>
+          </p:cNvSpPr>
+          <p:nvPr>
+            <p:ph type="subTitle" idx="1"/>
+          </p:nvPr>
+        </p:nvSpPr>
+        <p:spPr/>
+        <p:txBody>
+          <a:bodyPr/>
+          <a:lstStyle/>
+          <a:p>
+            <a:pPr>
+              <a:buNone/>
+            </a:pPr>
+            <a:endParaRPr lang="en-GB" dirty="0"/>
           </a:p>
         </p:txBody>
       </p:sp>
@@ -26925,7 +27073,7 @@
           <a:bodyPr/>
           <a:lstStyle/>
           <a:p>
-            <a:endParaRPr lang="en-GB" noProof="0" dirty="0"/>
+            <a:endParaRPr lang="en-GB" dirty="0"/>
           </a:p>
         </p:txBody>
       </p:sp>
@@ -26944,7 +27092,7 @@
           <a:bodyPr/>
           <a:lstStyle/>
           <a:p>
-            <a:endParaRPr lang="en-GB" noProof="0" dirty="0"/>
+            <a:endParaRPr lang="en-GB" dirty="0"/>
           </a:p>
         </p:txBody>
       </p:sp>
@@ -26963,257 +27111,19 @@
           <a:bodyPr/>
           <a:lstStyle/>
           <a:p>
-            <a:fld id="{859873C9-BF5D-4A9A-BB31-45BBB7BABAF7}" type="slidenum">
-              <a:rPr lang="en-GB" noProof="0" smtClean="0"/>
+            <a:fld id="{24C8C45C-947F-4981-8B3F-4F32E973C901}" type="slidenum">
+              <a:rPr lang="en-GB" smtClean="0"/>
+              <a:pPr/>
               <a:t>47</a:t>
             </a:fld>
-            <a:endParaRPr lang="en-GB" noProof="0" dirty="0"/>
-          </a:p>
-        </p:txBody>
-      </p:sp>
-      <p:sp>
-        <p:nvSpPr>
-          <p:cNvPr id="7" name="Content Placeholder 2">
-            <a:extLst>
-              <a:ext uri="{FF2B5EF4-FFF2-40B4-BE49-F238E27FC236}">
-                <a16:creationId xmlns:a16="http://schemas.microsoft.com/office/drawing/2014/main" id="{236D5AD3-798D-4235-9534-A03E209C626B}"/>
-              </a:ext>
-            </a:extLst>
-          </p:cNvPr>
-          <p:cNvSpPr txBox="1">
-            <a:spLocks/>
-          </p:cNvSpPr>
-          <p:nvPr/>
-        </p:nvSpPr>
-        <p:spPr>
-          <a:xfrm>
-            <a:off x="809624" y="1533905"/>
-            <a:ext cx="10621963" cy="4310303"/>
-          </a:xfrm>
-          <a:prstGeom prst="rect">
-            <a:avLst/>
-          </a:prstGeom>
-        </p:spPr>
-        <p:txBody>
-          <a:bodyPr vert="horz" lIns="0" tIns="0" rIns="0" bIns="0" rtlCol="0">
-            <a:noAutofit/>
-          </a:bodyPr>
-          <a:lstStyle>
-            <a:lvl1pPr marL="216000" indent="-216000" algn="l" defTabSz="914400" rtl="0" eaLnBrk="1" latinLnBrk="0" hangingPunct="1">
-              <a:lnSpc>
-                <a:spcPct val="100000"/>
-              </a:lnSpc>
-              <a:spcBef>
-                <a:spcPts val="800"/>
-              </a:spcBef>
-              <a:buClr>
-                <a:schemeClr val="accent1"/>
-              </a:buClr>
-              <a:buFont typeface="Arial" panose="020B0604020202020204" pitchFamily="34" charset="0"/>
-              <a:buChar char="•"/>
-              <a:defRPr sz="2200" kern="1200">
-                <a:solidFill>
-                  <a:schemeClr val="tx1"/>
-                </a:solidFill>
-                <a:latin typeface="+mn-lt"/>
-                <a:ea typeface="+mn-ea"/>
-                <a:cs typeface="+mn-cs"/>
-              </a:defRPr>
-            </a:lvl1pPr>
-            <a:lvl2pPr marL="396000" indent="-180000" algn="l" defTabSz="914400" rtl="0" eaLnBrk="1" latinLnBrk="0" hangingPunct="1">
-              <a:lnSpc>
-                <a:spcPct val="100000"/>
-              </a:lnSpc>
-              <a:spcBef>
-                <a:spcPts val="800"/>
-              </a:spcBef>
-              <a:buFont typeface="Arial" panose="020B0604020202020204" pitchFamily="34" charset="0"/>
-              <a:buChar char="–"/>
-              <a:defRPr sz="1800" kern="1200">
-                <a:solidFill>
-                  <a:schemeClr val="tx1"/>
-                </a:solidFill>
-                <a:latin typeface="+mn-lt"/>
-                <a:ea typeface="+mn-ea"/>
-                <a:cs typeface="+mn-cs"/>
-              </a:defRPr>
-            </a:lvl2pPr>
-            <a:lvl3pPr marL="576000" indent="-180000" algn="l" defTabSz="914400" rtl="0" eaLnBrk="1" latinLnBrk="0" hangingPunct="1">
-              <a:lnSpc>
-                <a:spcPct val="100000"/>
-              </a:lnSpc>
-              <a:spcBef>
-                <a:spcPts val="800"/>
-              </a:spcBef>
-              <a:buFont typeface="Arial" panose="020B0604020202020204" pitchFamily="34" charset="0"/>
-              <a:buChar char="•"/>
-              <a:defRPr sz="1600" kern="1200">
-                <a:solidFill>
-                  <a:schemeClr val="tx1"/>
-                </a:solidFill>
-                <a:latin typeface="+mn-lt"/>
-                <a:ea typeface="+mn-ea"/>
-                <a:cs typeface="+mn-cs"/>
-              </a:defRPr>
-            </a:lvl3pPr>
-            <a:lvl4pPr marL="756000" indent="-180000" algn="l" defTabSz="914400" rtl="0" eaLnBrk="1" latinLnBrk="0" hangingPunct="1">
-              <a:lnSpc>
-                <a:spcPct val="100000"/>
-              </a:lnSpc>
-              <a:spcBef>
-                <a:spcPts val="800"/>
-              </a:spcBef>
-              <a:buFont typeface="Arial" panose="020B0604020202020204" pitchFamily="34" charset="0"/>
-              <a:buChar char="–"/>
-              <a:defRPr sz="1400" kern="1200">
-                <a:solidFill>
-                  <a:schemeClr val="tx1"/>
-                </a:solidFill>
-                <a:latin typeface="+mn-lt"/>
-                <a:ea typeface="+mn-ea"/>
-                <a:cs typeface="+mn-cs"/>
-              </a:defRPr>
-            </a:lvl4pPr>
-            <a:lvl5pPr marL="936000" indent="-180000" algn="l" defTabSz="914400" rtl="0" eaLnBrk="1" latinLnBrk="0" hangingPunct="1">
-              <a:lnSpc>
-                <a:spcPct val="100000"/>
-              </a:lnSpc>
-              <a:spcBef>
-                <a:spcPts val="800"/>
-              </a:spcBef>
-              <a:buFont typeface="Arial" panose="020B0604020202020204" pitchFamily="34" charset="0"/>
-              <a:buChar char="•"/>
-              <a:defRPr sz="1400" kern="1200">
-                <a:solidFill>
-                  <a:schemeClr val="tx1"/>
-                </a:solidFill>
-                <a:latin typeface="+mn-lt"/>
-                <a:ea typeface="+mn-ea"/>
-                <a:cs typeface="+mn-cs"/>
-              </a:defRPr>
-            </a:lvl5pPr>
-            <a:lvl6pPr marL="936000" indent="-180000" algn="l" defTabSz="914400" rtl="0" eaLnBrk="1" latinLnBrk="0" hangingPunct="1">
-              <a:lnSpc>
-                <a:spcPct val="100000"/>
-              </a:lnSpc>
-              <a:spcBef>
-                <a:spcPts val="800"/>
-              </a:spcBef>
-              <a:buFont typeface="Arial" panose="020B0604020202020204" pitchFamily="34" charset="0"/>
-              <a:buChar char="•"/>
-              <a:defRPr sz="1400" kern="1200">
-                <a:solidFill>
-                  <a:schemeClr val="tx1"/>
-                </a:solidFill>
-                <a:latin typeface="+mn-lt"/>
-                <a:ea typeface="+mn-ea"/>
-                <a:cs typeface="+mn-cs"/>
-              </a:defRPr>
-            </a:lvl6pPr>
-            <a:lvl7pPr marL="936000" indent="-180000" algn="l" defTabSz="914400" rtl="0" eaLnBrk="1" latinLnBrk="0" hangingPunct="1">
-              <a:lnSpc>
-                <a:spcPct val="100000"/>
-              </a:lnSpc>
-              <a:spcBef>
-                <a:spcPts val="800"/>
-              </a:spcBef>
-              <a:buFont typeface="Arial" panose="020B0604020202020204" pitchFamily="34" charset="0"/>
-              <a:buChar char="•"/>
-              <a:defRPr sz="1400" kern="1200" baseline="0">
-                <a:solidFill>
-                  <a:schemeClr val="tx1"/>
-                </a:solidFill>
-                <a:latin typeface="+mn-lt"/>
-                <a:ea typeface="+mn-ea"/>
-                <a:cs typeface="+mn-cs"/>
-              </a:defRPr>
-            </a:lvl7pPr>
-            <a:lvl8pPr marL="936000" indent="-180000" algn="l" defTabSz="914400" rtl="0" eaLnBrk="1" latinLnBrk="0" hangingPunct="1">
-              <a:lnSpc>
-                <a:spcPct val="100000"/>
-              </a:lnSpc>
-              <a:spcBef>
-                <a:spcPts val="800"/>
-              </a:spcBef>
-              <a:buFont typeface="Arial" panose="020B0604020202020204" pitchFamily="34" charset="0"/>
-              <a:buChar char="•"/>
-              <a:defRPr sz="1400" kern="1200">
-                <a:solidFill>
-                  <a:schemeClr val="tx1"/>
-                </a:solidFill>
-                <a:latin typeface="+mn-lt"/>
-                <a:ea typeface="+mn-ea"/>
-                <a:cs typeface="+mn-cs"/>
-              </a:defRPr>
-            </a:lvl8pPr>
-            <a:lvl9pPr marL="936000" indent="-180000" algn="l" defTabSz="914400" rtl="0" eaLnBrk="1" latinLnBrk="0" hangingPunct="1">
-              <a:lnSpc>
-                <a:spcPct val="100000"/>
-              </a:lnSpc>
-              <a:spcBef>
-                <a:spcPts val="800"/>
-              </a:spcBef>
-              <a:buFont typeface="Arial" panose="020B0604020202020204" pitchFamily="34" charset="0"/>
-              <a:buChar char="•"/>
-              <a:defRPr sz="1400" kern="1200" baseline="0">
-                <a:solidFill>
-                  <a:schemeClr val="tx1"/>
-                </a:solidFill>
-                <a:latin typeface="+mn-lt"/>
-                <a:ea typeface="+mn-ea"/>
-                <a:cs typeface="+mn-cs"/>
-              </a:defRPr>
-            </a:lvl9pPr>
-          </a:lstStyle>
-          <a:p>
-            <a:r>
-              <a:rPr lang="en-US" sz="3200" dirty="0"/>
-              <a:t>Fork your colleagues GitHub repo</a:t>
-            </a:r>
-          </a:p>
-          <a:p>
-            <a:r>
-              <a:rPr lang="en-US" sz="3200" dirty="0"/>
-              <a:t>Clone</a:t>
-            </a:r>
-          </a:p>
-          <a:p>
-            <a:r>
-              <a:rPr lang="en-US" sz="3200" dirty="0"/>
-              <a:t>Create a new branch from “master” in git bash –  “collaborate”</a:t>
-            </a:r>
-          </a:p>
-          <a:p>
-            <a:r>
-              <a:rPr lang="en-US" sz="3200" dirty="0"/>
-              <a:t>Change something</a:t>
-            </a:r>
-          </a:p>
-          <a:p>
-            <a:r>
-              <a:rPr lang="en-US" sz="3200" dirty="0"/>
-              <a:t>Push it to remote “collaborate” branch</a:t>
-            </a:r>
-          </a:p>
-          <a:p>
-            <a:r>
-              <a:rPr lang="en-US" sz="3200" dirty="0"/>
-              <a:t>Create a pull request</a:t>
-            </a:r>
-          </a:p>
-          <a:p>
-            <a:r>
-              <a:rPr lang="en-US" sz="3200" dirty="0"/>
-              <a:t>Ask colleague to review and merge pull request</a:t>
-            </a:r>
-            <a:endParaRPr lang="lt-LT" sz="3200" dirty="0"/>
+            <a:endParaRPr lang="en-GB" dirty="0"/>
           </a:p>
         </p:txBody>
       </p:sp>
     </p:spTree>
     <p:extLst>
       <p:ext uri="{BB962C8B-B14F-4D97-AF65-F5344CB8AC3E}">
-        <p14:creationId xmlns:p14="http://schemas.microsoft.com/office/powerpoint/2010/main" val="1156307921"/>
+        <p14:creationId xmlns:p14="http://schemas.microsoft.com/office/powerpoint/2010/main" val="1693456263"/>
       </p:ext>
     </p:extLst>
   </p:cSld>
@@ -27240,149 +27150,349 @@
           <a:chExt cx="0" cy="0"/>
         </a:xfrm>
       </p:grpSpPr>
-      <p:pic>
-        <p:nvPicPr>
-          <p:cNvPr id="10" name="Picture Placeholder 9"/>
-          <p:cNvPicPr>
-            <a:picLocks noGrp="1" noChangeAspect="1"/>
-          </p:cNvPicPr>
-          <p:nvPr>
-            <p:ph type="pic" sz="quarter" idx="13"/>
-          </p:nvPr>
-        </p:nvPicPr>
-        <p:blipFill>
-          <a:blip r:embed="rId3">
+      <p:sp>
+        <p:nvSpPr>
+          <p:cNvPr id="2" name="Title 1"/>
+          <p:cNvSpPr>
+            <a:spLocks noGrp="1"/>
+          </p:cNvSpPr>
+          <p:nvPr>
+            <p:ph type="title"/>
+          </p:nvPr>
+        </p:nvSpPr>
+        <p:spPr>
+          <a:xfrm>
+            <a:off x="784224" y="481665"/>
+            <a:ext cx="10671175" cy="1052240"/>
+          </a:xfrm>
+        </p:spPr>
+        <p:txBody>
+          <a:bodyPr/>
+          <a:lstStyle/>
+          <a:p>
+            <a:r>
+              <a:rPr lang="en-US" dirty="0"/>
+              <a:t>Task</a:t>
+            </a:r>
+            <a:r>
+              <a:rPr lang="lt-LT" dirty="0"/>
+              <a:t> </a:t>
+            </a:r>
+            <a:r>
+              <a:rPr lang="en-US" dirty="0"/>
+              <a:t>#7 (using </a:t>
+            </a:r>
+            <a:r>
+              <a:rPr lang="en-US" dirty="0" err="1"/>
+              <a:t>Intellij</a:t>
+            </a:r>
+            <a:r>
+              <a:rPr lang="en-US" dirty="0"/>
+              <a:t> IDE)</a:t>
+            </a:r>
+            <a:endParaRPr lang="lt-LT" dirty="0"/>
+          </a:p>
+        </p:txBody>
+      </p:sp>
+      <p:sp>
+        <p:nvSpPr>
+          <p:cNvPr id="4" name="Date Placeholder 3"/>
+          <p:cNvSpPr>
+            <a:spLocks noGrp="1"/>
+          </p:cNvSpPr>
+          <p:nvPr>
+            <p:ph type="dt" sz="half" idx="10"/>
+          </p:nvPr>
+        </p:nvSpPr>
+        <p:spPr/>
+        <p:txBody>
+          <a:bodyPr/>
+          <a:lstStyle/>
+          <a:p>
+            <a:endParaRPr lang="en-GB" noProof="0" dirty="0"/>
+          </a:p>
+        </p:txBody>
+      </p:sp>
+      <p:sp>
+        <p:nvSpPr>
+          <p:cNvPr id="5" name="Footer Placeholder 4"/>
+          <p:cNvSpPr>
+            <a:spLocks noGrp="1"/>
+          </p:cNvSpPr>
+          <p:nvPr>
+            <p:ph type="ftr" sz="quarter" idx="11"/>
+          </p:nvPr>
+        </p:nvSpPr>
+        <p:spPr/>
+        <p:txBody>
+          <a:bodyPr/>
+          <a:lstStyle/>
+          <a:p>
+            <a:endParaRPr lang="en-GB" noProof="0" dirty="0"/>
+          </a:p>
+        </p:txBody>
+      </p:sp>
+      <p:sp>
+        <p:nvSpPr>
+          <p:cNvPr id="6" name="Slide Number Placeholder 5"/>
+          <p:cNvSpPr>
+            <a:spLocks noGrp="1"/>
+          </p:cNvSpPr>
+          <p:nvPr>
+            <p:ph type="sldNum" sz="quarter" idx="12"/>
+          </p:nvPr>
+        </p:nvSpPr>
+        <p:spPr/>
+        <p:txBody>
+          <a:bodyPr/>
+          <a:lstStyle/>
+          <a:p>
+            <a:fld id="{859873C9-BF5D-4A9A-BB31-45BBB7BABAF7}" type="slidenum">
+              <a:rPr lang="en-GB" noProof="0" smtClean="0"/>
+              <a:t>48</a:t>
+            </a:fld>
+            <a:endParaRPr lang="en-GB" noProof="0" dirty="0"/>
+          </a:p>
+        </p:txBody>
+      </p:sp>
+      <p:sp>
+        <p:nvSpPr>
+          <p:cNvPr id="7" name="Content Placeholder 2">
             <a:extLst>
-              <a:ext uri="{28A0092B-C50C-407E-A947-70E740481C1C}">
-                <a14:useLocalDpi xmlns:a14="http://schemas.microsoft.com/office/drawing/2010/main" val="0"/>
+              <a:ext uri="{FF2B5EF4-FFF2-40B4-BE49-F238E27FC236}">
+                <a16:creationId xmlns:a16="http://schemas.microsoft.com/office/drawing/2014/main" id="{236D5AD3-798D-4235-9534-A03E209C626B}"/>
               </a:ext>
             </a:extLst>
-          </a:blip>
-          <a:srcRect l="4" r="4"/>
-          <a:stretch>
-            <a:fillRect/>
-          </a:stretch>
-        </p:blipFill>
-        <p:spPr/>
-      </p:pic>
-      <p:sp>
-        <p:nvSpPr>
-          <p:cNvPr id="7" name="Title 6"/>
-          <p:cNvSpPr>
-            <a:spLocks noGrp="1"/>
-          </p:cNvSpPr>
-          <p:nvPr>
-            <p:ph type="ctrTitle"/>
-          </p:nvPr>
-        </p:nvSpPr>
-        <p:spPr/>
-        <p:txBody>
-          <a:bodyPr/>
-          <a:lstStyle/>
-          <a:p>
-            <a:r>
-              <a:rPr lang="en-US" dirty="0"/>
-              <a:t>Practice</a:t>
-            </a:r>
-            <a:br>
-              <a:rPr lang="en-US" dirty="0"/>
-            </a:br>
-            <a:r>
-              <a:rPr lang="en-US" dirty="0"/>
-              <a:t>(part 2)</a:t>
-            </a:r>
-            <a:endParaRPr lang="en-GB" dirty="0"/>
-          </a:p>
-        </p:txBody>
-      </p:sp>
-      <p:sp>
-        <p:nvSpPr>
-          <p:cNvPr id="8" name="Subtitle 7"/>
-          <p:cNvSpPr>
-            <a:spLocks noGrp="1"/>
-          </p:cNvSpPr>
-          <p:nvPr>
-            <p:ph type="subTitle" idx="1"/>
-          </p:nvPr>
-        </p:nvSpPr>
-        <p:spPr/>
-        <p:txBody>
-          <a:bodyPr/>
-          <a:lstStyle/>
-          <a:p>
-            <a:pPr>
-              <a:buNone/>
-            </a:pPr>
-            <a:endParaRPr lang="en-GB" dirty="0"/>
-          </a:p>
-        </p:txBody>
-      </p:sp>
-      <p:sp>
-        <p:nvSpPr>
-          <p:cNvPr id="4" name="Date Placeholder 3"/>
-          <p:cNvSpPr>
-            <a:spLocks noGrp="1"/>
-          </p:cNvSpPr>
-          <p:nvPr>
-            <p:ph type="dt" sz="half" idx="10"/>
-          </p:nvPr>
-        </p:nvSpPr>
-        <p:spPr/>
-        <p:txBody>
-          <a:bodyPr/>
-          <a:lstStyle/>
-          <a:p>
-            <a:endParaRPr lang="en-GB" dirty="0"/>
-          </a:p>
-        </p:txBody>
-      </p:sp>
-      <p:sp>
-        <p:nvSpPr>
-          <p:cNvPr id="5" name="Footer Placeholder 4"/>
-          <p:cNvSpPr>
-            <a:spLocks noGrp="1"/>
-          </p:cNvSpPr>
-          <p:nvPr>
-            <p:ph type="ftr" sz="quarter" idx="11"/>
-          </p:nvPr>
-        </p:nvSpPr>
-        <p:spPr/>
-        <p:txBody>
-          <a:bodyPr/>
-          <a:lstStyle/>
-          <a:p>
-            <a:endParaRPr lang="en-GB" dirty="0"/>
-          </a:p>
-        </p:txBody>
-      </p:sp>
-      <p:sp>
-        <p:nvSpPr>
-          <p:cNvPr id="6" name="Slide Number Placeholder 5"/>
-          <p:cNvSpPr>
-            <a:spLocks noGrp="1"/>
-          </p:cNvSpPr>
-          <p:nvPr>
-            <p:ph type="sldNum" sz="quarter" idx="12"/>
-          </p:nvPr>
-        </p:nvSpPr>
-        <p:spPr/>
-        <p:txBody>
-          <a:bodyPr/>
-          <a:lstStyle/>
-          <a:p>
-            <a:fld id="{24C8C45C-947F-4981-8B3F-4F32E973C901}" type="slidenum">
-              <a:rPr lang="en-GB" smtClean="0"/>
-              <a:pPr/>
-              <a:t>48</a:t>
-            </a:fld>
-            <a:endParaRPr lang="en-GB" dirty="0"/>
+          </p:cNvPr>
+          <p:cNvSpPr txBox="1">
+            <a:spLocks/>
+          </p:cNvSpPr>
+          <p:nvPr/>
+        </p:nvSpPr>
+        <p:spPr>
+          <a:xfrm>
+            <a:off x="788368" y="1533905"/>
+            <a:ext cx="10621963" cy="4310303"/>
+          </a:xfrm>
+          <a:prstGeom prst="rect">
+            <a:avLst/>
+          </a:prstGeom>
+        </p:spPr>
+        <p:txBody>
+          <a:bodyPr vert="horz" lIns="0" tIns="0" rIns="0" bIns="0" rtlCol="0">
+            <a:noAutofit/>
+          </a:bodyPr>
+          <a:lstStyle>
+            <a:lvl1pPr marL="216000" indent="-216000" algn="l" defTabSz="914400" rtl="0" eaLnBrk="1" latinLnBrk="0" hangingPunct="1">
+              <a:lnSpc>
+                <a:spcPct val="100000"/>
+              </a:lnSpc>
+              <a:spcBef>
+                <a:spcPts val="800"/>
+              </a:spcBef>
+              <a:buClr>
+                <a:schemeClr val="accent1"/>
+              </a:buClr>
+              <a:buFont typeface="Arial" panose="020B0604020202020204" pitchFamily="34" charset="0"/>
+              <a:buChar char="•"/>
+              <a:defRPr sz="2200" kern="1200">
+                <a:solidFill>
+                  <a:schemeClr val="tx1"/>
+                </a:solidFill>
+                <a:latin typeface="+mn-lt"/>
+                <a:ea typeface="+mn-ea"/>
+                <a:cs typeface="+mn-cs"/>
+              </a:defRPr>
+            </a:lvl1pPr>
+            <a:lvl2pPr marL="396000" indent="-180000" algn="l" defTabSz="914400" rtl="0" eaLnBrk="1" latinLnBrk="0" hangingPunct="1">
+              <a:lnSpc>
+                <a:spcPct val="100000"/>
+              </a:lnSpc>
+              <a:spcBef>
+                <a:spcPts val="800"/>
+              </a:spcBef>
+              <a:buFont typeface="Arial" panose="020B0604020202020204" pitchFamily="34" charset="0"/>
+              <a:buChar char="–"/>
+              <a:defRPr sz="1800" kern="1200">
+                <a:solidFill>
+                  <a:schemeClr val="tx1"/>
+                </a:solidFill>
+                <a:latin typeface="+mn-lt"/>
+                <a:ea typeface="+mn-ea"/>
+                <a:cs typeface="+mn-cs"/>
+              </a:defRPr>
+            </a:lvl2pPr>
+            <a:lvl3pPr marL="576000" indent="-180000" algn="l" defTabSz="914400" rtl="0" eaLnBrk="1" latinLnBrk="0" hangingPunct="1">
+              <a:lnSpc>
+                <a:spcPct val="100000"/>
+              </a:lnSpc>
+              <a:spcBef>
+                <a:spcPts val="800"/>
+              </a:spcBef>
+              <a:buFont typeface="Arial" panose="020B0604020202020204" pitchFamily="34" charset="0"/>
+              <a:buChar char="•"/>
+              <a:defRPr sz="1600" kern="1200">
+                <a:solidFill>
+                  <a:schemeClr val="tx1"/>
+                </a:solidFill>
+                <a:latin typeface="+mn-lt"/>
+                <a:ea typeface="+mn-ea"/>
+                <a:cs typeface="+mn-cs"/>
+              </a:defRPr>
+            </a:lvl3pPr>
+            <a:lvl4pPr marL="756000" indent="-180000" algn="l" defTabSz="914400" rtl="0" eaLnBrk="1" latinLnBrk="0" hangingPunct="1">
+              <a:lnSpc>
+                <a:spcPct val="100000"/>
+              </a:lnSpc>
+              <a:spcBef>
+                <a:spcPts val="800"/>
+              </a:spcBef>
+              <a:buFont typeface="Arial" panose="020B0604020202020204" pitchFamily="34" charset="0"/>
+              <a:buChar char="–"/>
+              <a:defRPr sz="1400" kern="1200">
+                <a:solidFill>
+                  <a:schemeClr val="tx1"/>
+                </a:solidFill>
+                <a:latin typeface="+mn-lt"/>
+                <a:ea typeface="+mn-ea"/>
+                <a:cs typeface="+mn-cs"/>
+              </a:defRPr>
+            </a:lvl4pPr>
+            <a:lvl5pPr marL="936000" indent="-180000" algn="l" defTabSz="914400" rtl="0" eaLnBrk="1" latinLnBrk="0" hangingPunct="1">
+              <a:lnSpc>
+                <a:spcPct val="100000"/>
+              </a:lnSpc>
+              <a:spcBef>
+                <a:spcPts val="800"/>
+              </a:spcBef>
+              <a:buFont typeface="Arial" panose="020B0604020202020204" pitchFamily="34" charset="0"/>
+              <a:buChar char="•"/>
+              <a:defRPr sz="1400" kern="1200">
+                <a:solidFill>
+                  <a:schemeClr val="tx1"/>
+                </a:solidFill>
+                <a:latin typeface="+mn-lt"/>
+                <a:ea typeface="+mn-ea"/>
+                <a:cs typeface="+mn-cs"/>
+              </a:defRPr>
+            </a:lvl5pPr>
+            <a:lvl6pPr marL="936000" indent="-180000" algn="l" defTabSz="914400" rtl="0" eaLnBrk="1" latinLnBrk="0" hangingPunct="1">
+              <a:lnSpc>
+                <a:spcPct val="100000"/>
+              </a:lnSpc>
+              <a:spcBef>
+                <a:spcPts val="800"/>
+              </a:spcBef>
+              <a:buFont typeface="Arial" panose="020B0604020202020204" pitchFamily="34" charset="0"/>
+              <a:buChar char="•"/>
+              <a:defRPr sz="1400" kern="1200">
+                <a:solidFill>
+                  <a:schemeClr val="tx1"/>
+                </a:solidFill>
+                <a:latin typeface="+mn-lt"/>
+                <a:ea typeface="+mn-ea"/>
+                <a:cs typeface="+mn-cs"/>
+              </a:defRPr>
+            </a:lvl6pPr>
+            <a:lvl7pPr marL="936000" indent="-180000" algn="l" defTabSz="914400" rtl="0" eaLnBrk="1" latinLnBrk="0" hangingPunct="1">
+              <a:lnSpc>
+                <a:spcPct val="100000"/>
+              </a:lnSpc>
+              <a:spcBef>
+                <a:spcPts val="800"/>
+              </a:spcBef>
+              <a:buFont typeface="Arial" panose="020B0604020202020204" pitchFamily="34" charset="0"/>
+              <a:buChar char="•"/>
+              <a:defRPr sz="1400" kern="1200" baseline="0">
+                <a:solidFill>
+                  <a:schemeClr val="tx1"/>
+                </a:solidFill>
+                <a:latin typeface="+mn-lt"/>
+                <a:ea typeface="+mn-ea"/>
+                <a:cs typeface="+mn-cs"/>
+              </a:defRPr>
+            </a:lvl7pPr>
+            <a:lvl8pPr marL="936000" indent="-180000" algn="l" defTabSz="914400" rtl="0" eaLnBrk="1" latinLnBrk="0" hangingPunct="1">
+              <a:lnSpc>
+                <a:spcPct val="100000"/>
+              </a:lnSpc>
+              <a:spcBef>
+                <a:spcPts val="800"/>
+              </a:spcBef>
+              <a:buFont typeface="Arial" panose="020B0604020202020204" pitchFamily="34" charset="0"/>
+              <a:buChar char="•"/>
+              <a:defRPr sz="1400" kern="1200">
+                <a:solidFill>
+                  <a:schemeClr val="tx1"/>
+                </a:solidFill>
+                <a:latin typeface="+mn-lt"/>
+                <a:ea typeface="+mn-ea"/>
+                <a:cs typeface="+mn-cs"/>
+              </a:defRPr>
+            </a:lvl8pPr>
+            <a:lvl9pPr marL="936000" indent="-180000" algn="l" defTabSz="914400" rtl="0" eaLnBrk="1" latinLnBrk="0" hangingPunct="1">
+              <a:lnSpc>
+                <a:spcPct val="100000"/>
+              </a:lnSpc>
+              <a:spcBef>
+                <a:spcPts val="800"/>
+              </a:spcBef>
+              <a:buFont typeface="Arial" panose="020B0604020202020204" pitchFamily="34" charset="0"/>
+              <a:buChar char="•"/>
+              <a:defRPr sz="1400" kern="1200" baseline="0">
+                <a:solidFill>
+                  <a:schemeClr val="tx1"/>
+                </a:solidFill>
+                <a:latin typeface="+mn-lt"/>
+                <a:ea typeface="+mn-ea"/>
+                <a:cs typeface="+mn-cs"/>
+              </a:defRPr>
+            </a:lvl9pPr>
+          </a:lstStyle>
+          <a:p>
+            <a:r>
+              <a:rPr lang="en-US" sz="3200" dirty="0"/>
+              <a:t>Create a new “Hello world!” project in </a:t>
+            </a:r>
+            <a:r>
+              <a:rPr lang="en-US" sz="3200" dirty="0" err="1"/>
+              <a:t>Intellij</a:t>
+            </a:r>
+            <a:endParaRPr lang="en-US" sz="3200" dirty="0"/>
+          </a:p>
+          <a:p>
+            <a:r>
+              <a:rPr lang="en-US" sz="3200" dirty="0"/>
+              <a:t>Run it!</a:t>
+            </a:r>
+          </a:p>
+          <a:p>
+            <a:r>
+              <a:rPr lang="en-US" sz="3200" dirty="0"/>
+              <a:t>Init git repo</a:t>
+            </a:r>
+          </a:p>
+          <a:p>
+            <a:r>
+              <a:rPr lang="en-US" sz="3200" dirty="0"/>
+              <a:t>Ignore compiled files including the directories they’re in</a:t>
+            </a:r>
+          </a:p>
+          <a:p>
+            <a:r>
+              <a:rPr lang="en-US" sz="3200" dirty="0"/>
+              <a:t>Commit changes</a:t>
+            </a:r>
+          </a:p>
+          <a:p>
+            <a:endParaRPr lang="lt-LT" sz="3200" dirty="0"/>
           </a:p>
         </p:txBody>
       </p:sp>
     </p:spTree>
     <p:extLst>
       <p:ext uri="{BB962C8B-B14F-4D97-AF65-F5344CB8AC3E}">
-        <p14:creationId xmlns:p14="http://schemas.microsoft.com/office/powerpoint/2010/main" val="1693456263"/>
+        <p14:creationId xmlns:p14="http://schemas.microsoft.com/office/powerpoint/2010/main" val="2480090358"/>
       </p:ext>
     </p:extLst>
   </p:cSld>
@@ -27439,7 +27549,7 @@
             </a:r>
             <a:r>
               <a:rPr lang="en-US" dirty="0"/>
-              <a:t>#7 (using </a:t>
+              <a:t>#8 (using </a:t>
             </a:r>
             <a:r>
               <a:rPr lang="en-US" dirty="0" err="1"/>
@@ -27711,47 +27821,27 @@
           <a:p>
             <a:r>
               <a:rPr lang="en-US" sz="3200" dirty="0"/>
-              <a:t>Create a new “Hello world!” project in </a:t>
-            </a:r>
-            <a:r>
-              <a:rPr lang="en-US" sz="3200" dirty="0" err="1"/>
-              <a:t>Intellij</a:t>
-            </a:r>
-            <a:endParaRPr lang="en-US" sz="3200" dirty="0"/>
+              <a:t>Create a new branch “feature”</a:t>
+            </a:r>
           </a:p>
           <a:p>
             <a:r>
               <a:rPr lang="en-US" sz="3200" dirty="0"/>
-              <a:t>Run it!</a:t>
+              <a:t>Make some changes in that branch</a:t>
             </a:r>
           </a:p>
           <a:p>
             <a:r>
               <a:rPr lang="en-US" sz="3200" dirty="0"/>
-              <a:t>Init git repo</a:t>
-            </a:r>
-          </a:p>
-          <a:p>
-            <a:r>
-              <a:rPr lang="en-US" sz="3200" dirty="0"/>
-              <a:t>Ignore compiled files including the directories they’re in</a:t>
-            </a:r>
-          </a:p>
-          <a:p>
-            <a:r>
-              <a:rPr lang="en-US" sz="3200" dirty="0"/>
-              <a:t>Commit changes</a:t>
-            </a:r>
-          </a:p>
-          <a:p>
-            <a:endParaRPr lang="lt-LT" sz="3200" dirty="0"/>
+              <a:t>Merge master with branch</a:t>
+            </a:r>
           </a:p>
         </p:txBody>
       </p:sp>
     </p:spTree>
     <p:extLst>
       <p:ext uri="{BB962C8B-B14F-4D97-AF65-F5344CB8AC3E}">
-        <p14:creationId xmlns:p14="http://schemas.microsoft.com/office/powerpoint/2010/main" val="2480090358"/>
+        <p14:creationId xmlns:p14="http://schemas.microsoft.com/office/powerpoint/2010/main" val="3812996559"/>
       </p:ext>
     </p:extLst>
   </p:cSld>
@@ -28028,7 +28118,7 @@
             </a:r>
             <a:r>
               <a:rPr lang="en-US" dirty="0"/>
-              <a:t>#8 (using </a:t>
+              <a:t>#9 (using </a:t>
             </a:r>
             <a:r>
               <a:rPr lang="en-US" dirty="0" err="1"/>
@@ -28300,19 +28390,19 @@
           <a:p>
             <a:r>
               <a:rPr lang="en-US" sz="3200" dirty="0"/>
-              <a:t>Create a new branch “feature”</a:t>
+              <a:t>Create a new branch “conflicts” from master</a:t>
             </a:r>
           </a:p>
           <a:p>
             <a:r>
               <a:rPr lang="en-US" sz="3200" dirty="0"/>
-              <a:t>Make some changes in that branch</a:t>
+              <a:t>Create conflicting commits in master and new branch</a:t>
             </a:r>
           </a:p>
           <a:p>
             <a:r>
               <a:rPr lang="en-US" sz="3200" dirty="0"/>
-              <a:t>Merge master with branch</a:t>
+              <a:t>Rebase master with branch (resolve conflict)</a:t>
             </a:r>
           </a:p>
         </p:txBody>
@@ -28320,7 +28410,7 @@
     </p:spTree>
     <p:extLst>
       <p:ext uri="{BB962C8B-B14F-4D97-AF65-F5344CB8AC3E}">
-        <p14:creationId xmlns:p14="http://schemas.microsoft.com/office/powerpoint/2010/main" val="3812996559"/>
+        <p14:creationId xmlns:p14="http://schemas.microsoft.com/office/powerpoint/2010/main" val="2199777528"/>
       </p:ext>
     </p:extLst>
   </p:cSld>
@@ -28377,7 +28467,7 @@
             </a:r>
             <a:r>
               <a:rPr lang="en-US" dirty="0"/>
-              <a:t>#9 (using </a:t>
+              <a:t>#10 (using </a:t>
             </a:r>
             <a:r>
               <a:rPr lang="en-US" dirty="0" err="1"/>
@@ -28447,355 +28537,6 @@
             <a:fld id="{859873C9-BF5D-4A9A-BB31-45BBB7BABAF7}" type="slidenum">
               <a:rPr lang="en-GB" noProof="0" smtClean="0"/>
               <a:t>51</a:t>
-            </a:fld>
-            <a:endParaRPr lang="en-GB" noProof="0" dirty="0"/>
-          </a:p>
-        </p:txBody>
-      </p:sp>
-      <p:sp>
-        <p:nvSpPr>
-          <p:cNvPr id="7" name="Content Placeholder 2">
-            <a:extLst>
-              <a:ext uri="{FF2B5EF4-FFF2-40B4-BE49-F238E27FC236}">
-                <a16:creationId xmlns:a16="http://schemas.microsoft.com/office/drawing/2014/main" id="{236D5AD3-798D-4235-9534-A03E209C626B}"/>
-              </a:ext>
-            </a:extLst>
-          </p:cNvPr>
-          <p:cNvSpPr txBox="1">
-            <a:spLocks/>
-          </p:cNvSpPr>
-          <p:nvPr/>
-        </p:nvSpPr>
-        <p:spPr>
-          <a:xfrm>
-            <a:off x="788368" y="1533905"/>
-            <a:ext cx="10621963" cy="4310303"/>
-          </a:xfrm>
-          <a:prstGeom prst="rect">
-            <a:avLst/>
-          </a:prstGeom>
-        </p:spPr>
-        <p:txBody>
-          <a:bodyPr vert="horz" lIns="0" tIns="0" rIns="0" bIns="0" rtlCol="0">
-            <a:noAutofit/>
-          </a:bodyPr>
-          <a:lstStyle>
-            <a:lvl1pPr marL="216000" indent="-216000" algn="l" defTabSz="914400" rtl="0" eaLnBrk="1" latinLnBrk="0" hangingPunct="1">
-              <a:lnSpc>
-                <a:spcPct val="100000"/>
-              </a:lnSpc>
-              <a:spcBef>
-                <a:spcPts val="800"/>
-              </a:spcBef>
-              <a:buClr>
-                <a:schemeClr val="accent1"/>
-              </a:buClr>
-              <a:buFont typeface="Arial" panose="020B0604020202020204" pitchFamily="34" charset="0"/>
-              <a:buChar char="•"/>
-              <a:defRPr sz="2200" kern="1200">
-                <a:solidFill>
-                  <a:schemeClr val="tx1"/>
-                </a:solidFill>
-                <a:latin typeface="+mn-lt"/>
-                <a:ea typeface="+mn-ea"/>
-                <a:cs typeface="+mn-cs"/>
-              </a:defRPr>
-            </a:lvl1pPr>
-            <a:lvl2pPr marL="396000" indent="-180000" algn="l" defTabSz="914400" rtl="0" eaLnBrk="1" latinLnBrk="0" hangingPunct="1">
-              <a:lnSpc>
-                <a:spcPct val="100000"/>
-              </a:lnSpc>
-              <a:spcBef>
-                <a:spcPts val="800"/>
-              </a:spcBef>
-              <a:buFont typeface="Arial" panose="020B0604020202020204" pitchFamily="34" charset="0"/>
-              <a:buChar char="–"/>
-              <a:defRPr sz="1800" kern="1200">
-                <a:solidFill>
-                  <a:schemeClr val="tx1"/>
-                </a:solidFill>
-                <a:latin typeface="+mn-lt"/>
-                <a:ea typeface="+mn-ea"/>
-                <a:cs typeface="+mn-cs"/>
-              </a:defRPr>
-            </a:lvl2pPr>
-            <a:lvl3pPr marL="576000" indent="-180000" algn="l" defTabSz="914400" rtl="0" eaLnBrk="1" latinLnBrk="0" hangingPunct="1">
-              <a:lnSpc>
-                <a:spcPct val="100000"/>
-              </a:lnSpc>
-              <a:spcBef>
-                <a:spcPts val="800"/>
-              </a:spcBef>
-              <a:buFont typeface="Arial" panose="020B0604020202020204" pitchFamily="34" charset="0"/>
-              <a:buChar char="•"/>
-              <a:defRPr sz="1600" kern="1200">
-                <a:solidFill>
-                  <a:schemeClr val="tx1"/>
-                </a:solidFill>
-                <a:latin typeface="+mn-lt"/>
-                <a:ea typeface="+mn-ea"/>
-                <a:cs typeface="+mn-cs"/>
-              </a:defRPr>
-            </a:lvl3pPr>
-            <a:lvl4pPr marL="756000" indent="-180000" algn="l" defTabSz="914400" rtl="0" eaLnBrk="1" latinLnBrk="0" hangingPunct="1">
-              <a:lnSpc>
-                <a:spcPct val="100000"/>
-              </a:lnSpc>
-              <a:spcBef>
-                <a:spcPts val="800"/>
-              </a:spcBef>
-              <a:buFont typeface="Arial" panose="020B0604020202020204" pitchFamily="34" charset="0"/>
-              <a:buChar char="–"/>
-              <a:defRPr sz="1400" kern="1200">
-                <a:solidFill>
-                  <a:schemeClr val="tx1"/>
-                </a:solidFill>
-                <a:latin typeface="+mn-lt"/>
-                <a:ea typeface="+mn-ea"/>
-                <a:cs typeface="+mn-cs"/>
-              </a:defRPr>
-            </a:lvl4pPr>
-            <a:lvl5pPr marL="936000" indent="-180000" algn="l" defTabSz="914400" rtl="0" eaLnBrk="1" latinLnBrk="0" hangingPunct="1">
-              <a:lnSpc>
-                <a:spcPct val="100000"/>
-              </a:lnSpc>
-              <a:spcBef>
-                <a:spcPts val="800"/>
-              </a:spcBef>
-              <a:buFont typeface="Arial" panose="020B0604020202020204" pitchFamily="34" charset="0"/>
-              <a:buChar char="•"/>
-              <a:defRPr sz="1400" kern="1200">
-                <a:solidFill>
-                  <a:schemeClr val="tx1"/>
-                </a:solidFill>
-                <a:latin typeface="+mn-lt"/>
-                <a:ea typeface="+mn-ea"/>
-                <a:cs typeface="+mn-cs"/>
-              </a:defRPr>
-            </a:lvl5pPr>
-            <a:lvl6pPr marL="936000" indent="-180000" algn="l" defTabSz="914400" rtl="0" eaLnBrk="1" latinLnBrk="0" hangingPunct="1">
-              <a:lnSpc>
-                <a:spcPct val="100000"/>
-              </a:lnSpc>
-              <a:spcBef>
-                <a:spcPts val="800"/>
-              </a:spcBef>
-              <a:buFont typeface="Arial" panose="020B0604020202020204" pitchFamily="34" charset="0"/>
-              <a:buChar char="•"/>
-              <a:defRPr sz="1400" kern="1200">
-                <a:solidFill>
-                  <a:schemeClr val="tx1"/>
-                </a:solidFill>
-                <a:latin typeface="+mn-lt"/>
-                <a:ea typeface="+mn-ea"/>
-                <a:cs typeface="+mn-cs"/>
-              </a:defRPr>
-            </a:lvl6pPr>
-            <a:lvl7pPr marL="936000" indent="-180000" algn="l" defTabSz="914400" rtl="0" eaLnBrk="1" latinLnBrk="0" hangingPunct="1">
-              <a:lnSpc>
-                <a:spcPct val="100000"/>
-              </a:lnSpc>
-              <a:spcBef>
-                <a:spcPts val="800"/>
-              </a:spcBef>
-              <a:buFont typeface="Arial" panose="020B0604020202020204" pitchFamily="34" charset="0"/>
-              <a:buChar char="•"/>
-              <a:defRPr sz="1400" kern="1200" baseline="0">
-                <a:solidFill>
-                  <a:schemeClr val="tx1"/>
-                </a:solidFill>
-                <a:latin typeface="+mn-lt"/>
-                <a:ea typeface="+mn-ea"/>
-                <a:cs typeface="+mn-cs"/>
-              </a:defRPr>
-            </a:lvl7pPr>
-            <a:lvl8pPr marL="936000" indent="-180000" algn="l" defTabSz="914400" rtl="0" eaLnBrk="1" latinLnBrk="0" hangingPunct="1">
-              <a:lnSpc>
-                <a:spcPct val="100000"/>
-              </a:lnSpc>
-              <a:spcBef>
-                <a:spcPts val="800"/>
-              </a:spcBef>
-              <a:buFont typeface="Arial" panose="020B0604020202020204" pitchFamily="34" charset="0"/>
-              <a:buChar char="•"/>
-              <a:defRPr sz="1400" kern="1200">
-                <a:solidFill>
-                  <a:schemeClr val="tx1"/>
-                </a:solidFill>
-                <a:latin typeface="+mn-lt"/>
-                <a:ea typeface="+mn-ea"/>
-                <a:cs typeface="+mn-cs"/>
-              </a:defRPr>
-            </a:lvl8pPr>
-            <a:lvl9pPr marL="936000" indent="-180000" algn="l" defTabSz="914400" rtl="0" eaLnBrk="1" latinLnBrk="0" hangingPunct="1">
-              <a:lnSpc>
-                <a:spcPct val="100000"/>
-              </a:lnSpc>
-              <a:spcBef>
-                <a:spcPts val="800"/>
-              </a:spcBef>
-              <a:buFont typeface="Arial" panose="020B0604020202020204" pitchFamily="34" charset="0"/>
-              <a:buChar char="•"/>
-              <a:defRPr sz="1400" kern="1200" baseline="0">
-                <a:solidFill>
-                  <a:schemeClr val="tx1"/>
-                </a:solidFill>
-                <a:latin typeface="+mn-lt"/>
-                <a:ea typeface="+mn-ea"/>
-                <a:cs typeface="+mn-cs"/>
-              </a:defRPr>
-            </a:lvl9pPr>
-          </a:lstStyle>
-          <a:p>
-            <a:r>
-              <a:rPr lang="en-US" sz="3200" dirty="0"/>
-              <a:t>Create a new branch “conflicts” from master</a:t>
-            </a:r>
-          </a:p>
-          <a:p>
-            <a:r>
-              <a:rPr lang="en-US" sz="3200" dirty="0"/>
-              <a:t>Create conflicting commits in master and new branch</a:t>
-            </a:r>
-          </a:p>
-          <a:p>
-            <a:r>
-              <a:rPr lang="en-US" sz="3200" dirty="0"/>
-              <a:t>Rebase master with branch (resolve conflict)</a:t>
-            </a:r>
-          </a:p>
-        </p:txBody>
-      </p:sp>
-    </p:spTree>
-    <p:extLst>
-      <p:ext uri="{BB962C8B-B14F-4D97-AF65-F5344CB8AC3E}">
-        <p14:creationId xmlns:p14="http://schemas.microsoft.com/office/powerpoint/2010/main" val="2199777528"/>
-      </p:ext>
-    </p:extLst>
-  </p:cSld>
-  <p:clrMapOvr>
-    <a:masterClrMapping/>
-  </p:clrMapOvr>
-</p:sld>
-</file>
-
-<file path=ppt/slides/slide52.xml><?xml version="1.0" encoding="utf-8"?>
-<p:sld xmlns:a="http://schemas.openxmlformats.org/drawingml/2006/main" xmlns:r="http://schemas.openxmlformats.org/officeDocument/2006/relationships" xmlns:p="http://schemas.openxmlformats.org/presentationml/2006/main">
-  <p:cSld>
-    <p:spTree>
-      <p:nvGrpSpPr>
-        <p:cNvPr id="1" name=""/>
-        <p:cNvGrpSpPr/>
-        <p:nvPr/>
-      </p:nvGrpSpPr>
-      <p:grpSpPr>
-        <a:xfrm>
-          <a:off x="0" y="0"/>
-          <a:ext cx="0" cy="0"/>
-          <a:chOff x="0" y="0"/>
-          <a:chExt cx="0" cy="0"/>
-        </a:xfrm>
-      </p:grpSpPr>
-      <p:sp>
-        <p:nvSpPr>
-          <p:cNvPr id="2" name="Title 1"/>
-          <p:cNvSpPr>
-            <a:spLocks noGrp="1"/>
-          </p:cNvSpPr>
-          <p:nvPr>
-            <p:ph type="title"/>
-          </p:nvPr>
-        </p:nvSpPr>
-        <p:spPr>
-          <a:xfrm>
-            <a:off x="784224" y="481665"/>
-            <a:ext cx="10671175" cy="1052240"/>
-          </a:xfrm>
-        </p:spPr>
-        <p:txBody>
-          <a:bodyPr/>
-          <a:lstStyle/>
-          <a:p>
-            <a:r>
-              <a:rPr lang="en-US" dirty="0"/>
-              <a:t>Task</a:t>
-            </a:r>
-            <a:r>
-              <a:rPr lang="lt-LT" dirty="0"/>
-              <a:t> </a:t>
-            </a:r>
-            <a:r>
-              <a:rPr lang="en-US" dirty="0"/>
-              <a:t>#10 (using </a:t>
-            </a:r>
-            <a:r>
-              <a:rPr lang="en-US" dirty="0" err="1"/>
-              <a:t>Intellij</a:t>
-            </a:r>
-            <a:r>
-              <a:rPr lang="en-US" dirty="0"/>
-              <a:t> IDE)</a:t>
-            </a:r>
-            <a:endParaRPr lang="lt-LT" dirty="0"/>
-          </a:p>
-        </p:txBody>
-      </p:sp>
-      <p:sp>
-        <p:nvSpPr>
-          <p:cNvPr id="4" name="Date Placeholder 3"/>
-          <p:cNvSpPr>
-            <a:spLocks noGrp="1"/>
-          </p:cNvSpPr>
-          <p:nvPr>
-            <p:ph type="dt" sz="half" idx="10"/>
-          </p:nvPr>
-        </p:nvSpPr>
-        <p:spPr/>
-        <p:txBody>
-          <a:bodyPr/>
-          <a:lstStyle/>
-          <a:p>
-            <a:endParaRPr lang="en-GB" noProof="0" dirty="0"/>
-          </a:p>
-        </p:txBody>
-      </p:sp>
-      <p:sp>
-        <p:nvSpPr>
-          <p:cNvPr id="5" name="Footer Placeholder 4"/>
-          <p:cNvSpPr>
-            <a:spLocks noGrp="1"/>
-          </p:cNvSpPr>
-          <p:nvPr>
-            <p:ph type="ftr" sz="quarter" idx="11"/>
-          </p:nvPr>
-        </p:nvSpPr>
-        <p:spPr/>
-        <p:txBody>
-          <a:bodyPr/>
-          <a:lstStyle/>
-          <a:p>
-            <a:endParaRPr lang="en-GB" noProof="0" dirty="0"/>
-          </a:p>
-        </p:txBody>
-      </p:sp>
-      <p:sp>
-        <p:nvSpPr>
-          <p:cNvPr id="6" name="Slide Number Placeholder 5"/>
-          <p:cNvSpPr>
-            <a:spLocks noGrp="1"/>
-          </p:cNvSpPr>
-          <p:nvPr>
-            <p:ph type="sldNum" sz="quarter" idx="12"/>
-          </p:nvPr>
-        </p:nvSpPr>
-        <p:spPr/>
-        <p:txBody>
-          <a:bodyPr/>
-          <a:lstStyle/>
-          <a:p>
-            <a:fld id="{859873C9-BF5D-4A9A-BB31-45BBB7BABAF7}" type="slidenum">
-              <a:rPr lang="en-GB" noProof="0" smtClean="0"/>
-              <a:t>52</a:t>
             </a:fld>
             <a:endParaRPr lang="en-GB" noProof="0" dirty="0"/>
           </a:p>
@@ -30672,18 +30413,18 @@
 </file>
 
 <file path=customXml/item1.xml><?xml version="1.0" encoding="utf-8"?>
+<p:properties xmlns:p="http://schemas.microsoft.com/office/2006/metadata/properties" xmlns:xsi="http://www.w3.org/2001/XMLSchema-instance" xmlns:pc="http://schemas.microsoft.com/office/infopath/2007/PartnerControls">
+  <documentManagement/>
+</p:properties>
+</file>
+
+<file path=customXml/item2.xml><?xml version="1.0" encoding="utf-8"?>
 <?mso-contentType ?>
 <FormTemplates xmlns="http://schemas.microsoft.com/sharepoint/v3/contenttype/forms">
   <Display>DocumentLibraryForm</Display>
   <Edit>DocumentLibraryForm</Edit>
   <New>DocumentLibraryForm</New>
 </FormTemplates>
-</file>
-
-<file path=customXml/item2.xml><?xml version="1.0" encoding="utf-8"?>
-<p:properties xmlns:p="http://schemas.microsoft.com/office/2006/metadata/properties" xmlns:xsi="http://www.w3.org/2001/XMLSchema-instance" xmlns:pc="http://schemas.microsoft.com/office/infopath/2007/PartnerControls">
-  <documentManagement/>
-</p:properties>
 </file>
 
 <file path=customXml/item3.xml><?xml version="1.0" encoding="utf-8"?>
@@ -30835,18 +30576,18 @@
 </file>
 
 <file path=customXml/itemProps1.xml><?xml version="1.0" encoding="utf-8"?>
-<ds:datastoreItem xmlns:ds="http://schemas.openxmlformats.org/officeDocument/2006/customXml" ds:itemID="{C98144AE-B0E9-4A9D-8BA0-7C7CD27128C4}">
+<ds:datastoreItem xmlns:ds="http://schemas.openxmlformats.org/officeDocument/2006/customXml" ds:itemID="{1ED6C778-C4AA-4A66-B6B5-60690C5199CD}">
   <ds:schemaRefs>
-    <ds:schemaRef ds:uri="http://schemas.microsoft.com/sharepoint/v3/contenttype/forms"/>
+    <ds:schemaRef ds:uri="http://schemas.microsoft.com/office/2006/metadata/properties"/>
+    <ds:schemaRef ds:uri="http://schemas.microsoft.com/office/infopath/2007/PartnerControls"/>
   </ds:schemaRefs>
 </ds:datastoreItem>
 </file>
 
 <file path=customXml/itemProps2.xml><?xml version="1.0" encoding="utf-8"?>
-<ds:datastoreItem xmlns:ds="http://schemas.openxmlformats.org/officeDocument/2006/customXml" ds:itemID="{1ED6C778-C4AA-4A66-B6B5-60690C5199CD}">
+<ds:datastoreItem xmlns:ds="http://schemas.openxmlformats.org/officeDocument/2006/customXml" ds:itemID="{C98144AE-B0E9-4A9D-8BA0-7C7CD27128C4}">
   <ds:schemaRefs>
-    <ds:schemaRef ds:uri="http://schemas.microsoft.com/office/2006/metadata/properties"/>
-    <ds:schemaRef ds:uri="http://schemas.microsoft.com/office/infopath/2007/PartnerControls"/>
+    <ds:schemaRef ds:uri="http://schemas.microsoft.com/sharepoint/v3/contenttype/forms"/>
   </ds:schemaRefs>
 </ds:datastoreItem>
 </file>
